--- a/en/slides/18-Computer_Architecture-Processor.pptx
+++ b/en/slides/18-Computer_Architecture-Processor.pptx
@@ -126,13 +126,13 @@
   <p:extLst>
     <p:ext uri="{521415D9-36F7-43E2-AB2F-B90AF26B5E84}">
       <p14:sectionLst xmlns:p14="http://schemas.microsoft.com/office/powerpoint/2010/main">
-        <p14:section name="Opening" id="{80b0e80c-2aee-eee5-c59f-8354c397e1bb}">
+        <p14:section name="Opening" id="{a5ed0c69-aad6-f5e4-a7c4-2462bfca56d8}">
           <p14:sldIdLst>
             <p14:sldId id="256"/>
             <p14:sldId id="257"/>
           </p14:sldIdLst>
         </p14:section>
-        <p14:section name="The processor" id="{1aff5793-60d6-270b-ec8e-81d0a7e3cca3}">
+        <p14:section name="The processor" id="{dbcac9b3-677c-56e4-f63f-eb2371710cb3}">
           <p14:sldIdLst>
             <p14:sldId id="258"/>
             <p14:sldId id="259"/>
@@ -141,7 +141,7 @@
             <p14:sldId id="262"/>
           </p14:sldIdLst>
         </p14:section>
-        <p14:section name="Registers" id="{38bab1ba-c078-7cbf-f802-540fdc237807}">
+        <p14:section name="Registers" id="{323e9de8-f707-c65b-b9eb-3e5d0b070f5d}">
           <p14:sldIdLst>
             <p14:sldId id="263"/>
             <p14:sldId id="264"/>
@@ -149,18 +149,18 @@
             <p14:sldId id="266"/>
           </p14:sldIdLst>
         </p14:section>
-        <p14:section name="The stack" id="{aabf180c-7f03-f5df-e220-54c5d8ec1083}">
+        <p14:section name="The stack" id="{a4c45f8f-289f-fdec-866e-41c527ef042b}">
           <p14:sldIdLst>
             <p14:sldId id="267"/>
           </p14:sldIdLst>
         </p14:section>
-        <p14:section name="Processor models" id="{c1f58d0a-ad2e-2eee-4262-4be9d12e4b18}">
+        <p14:section name="Processor models" id="{7ddabd97-c8cc-17f8-aba4-0c0b29ba0fe1}">
           <p14:sldIdLst>
             <p14:sldId id="268"/>
             <p14:sldId id="269"/>
           </p14:sldIdLst>
         </p14:section>
-        <p14:section name="The ALU and the whole picture" id="{e040d4a7-1cf3-fbde-0663-57685143926c}">
+        <p14:section name="The ALU and the whole picture" id="{dc96d2f3-f1db-aa7c-15af-5c6d9c7dad42}">
           <p14:sldIdLst>
             <p14:sldId id="270"/>
             <p14:sldId id="271"/>
@@ -3298,7 +3298,63 @@
       </p:sp>
       <p:sp>
         <p:nvSpPr>
-          <p:cNvPr id="12" name="Shape 10"/>
+          <p:cNvPr id="12" name="Text 10"/>
+          <p:cNvSpPr txBox="1"/>
+          <p:nvPr/>
+        </p:nvSpPr>
+        <p:spPr>
+          <a:xfrm>
+            <a:off x="4693615" y="566928"/>
+            <a:ext cx="6949440" cy="640080"/>
+          </a:xfrm>
+          <a:prstGeom prst="rect">
+            <a:avLst/>
+          </a:prstGeom>
+          <a:noFill/>
+          <a:ln/>
+        </p:spPr>
+        <p:txBody>
+          <a:bodyPr wrap="square" lIns="0" tIns="0" rIns="0" bIns="0" rtlCol="0" anchor="t"/>
+          <a:lstStyle/>
+          <a:p>
+            <a:pPr algn="r" indent="0" marL="0">
+              <a:buNone/>
+            </a:pPr>
+            <a:r>
+              <a:rPr lang="en-US" sz="1300" dirty="0">
+                <a:solidFill>
+                  <a:srgbClr val="CFE3EA"/>
+                </a:solidFill>
+                <a:latin typeface="Calibri" pitchFamily="34" charset="0"/>
+                <a:ea typeface="Calibri" pitchFamily="34" charset="-122"/>
+                <a:cs typeface="Calibri" pitchFamily="34" charset="-120"/>
+              </a:rPr>
+              <a:t>Lecture deck. The listings, the complete program and how to test it are in the code deck:</a:t>
+            </a:r>
+            <a:endParaRPr lang="en-US" sz="1300" dirty="0"/>
+          </a:p>
+          <a:p>
+            <a:pPr algn="r" indent="0" marL="0">
+              <a:buNone/>
+            </a:pPr>
+            <a:r>
+              <a:rPr lang="en-US" sz="1300" dirty="0">
+                <a:solidFill>
+                  <a:srgbClr val="CFE3EA"/>
+                </a:solidFill>
+                <a:latin typeface="Calibri" pitchFamily="34" charset="0"/>
+                <a:ea typeface="Calibri" pitchFamily="34" charset="-122"/>
+                <a:cs typeface="Calibri" pitchFamily="34" charset="-120"/>
+              </a:rPr>
+              <a:t>18-Computer_Architecture-Processor-Code.pptx</a:t>
+            </a:r>
+            <a:endParaRPr lang="en-US" sz="1300" dirty="0"/>
+          </a:p>
+        </p:txBody>
+      </p:sp>
+      <p:sp>
+        <p:nvSpPr>
+          <p:cNvPr id="13" name="Shape 11"/>
           <p:cNvSpPr/>
           <p:nvPr/>
         </p:nvSpPr>
@@ -3325,7 +3381,7 @@
       </p:sp>
       <p:pic>
         <p:nvPicPr>
-          <p:cNvPr id="13" name="Image 0" descr="/Users/raffaelemontella/devel/riscv-prg32/computer-architecture-with-prg32/tools/assets/prg32qt_debugger.png">    </p:cNvPr>
+          <p:cNvPr id="14" name="Image 0" descr="/Users/raffaelemontella/devel/riscv-prg32/computer-architecture-with-prg32/tools/assets/prg32qt_debugger.png">    </p:cNvPr>
           <p:cNvPicPr>
             <a:picLocks noChangeAspect="1"/>
           </p:cNvPicPr>

--- a/en/slides/18-Computer_Architecture-Processor.pptx
+++ b/en/slides/18-Computer_Architecture-Processor.pptx
@@ -126,13 +126,13 @@
   <p:extLst>
     <p:ext uri="{521415D9-36F7-43E2-AB2F-B90AF26B5E84}">
       <p14:sectionLst xmlns:p14="http://schemas.microsoft.com/office/powerpoint/2010/main">
-        <p14:section name="Opening" id="{a5ed0c69-aad6-f5e4-a7c4-2462bfca56d8}">
+        <p14:section name="Opening" id="{c66ea04c-3690-e925-138a-b2a7550e21e1}">
           <p14:sldIdLst>
             <p14:sldId id="256"/>
             <p14:sldId id="257"/>
           </p14:sldIdLst>
         </p14:section>
-        <p14:section name="The processor" id="{dbcac9b3-677c-56e4-f63f-eb2371710cb3}">
+        <p14:section name="The processor" id="{bc7e9608-51b8-b5a1-de19-2ffce04120c1}">
           <p14:sldIdLst>
             <p14:sldId id="258"/>
             <p14:sldId id="259"/>
@@ -141,7 +141,7 @@
             <p14:sldId id="262"/>
           </p14:sldIdLst>
         </p14:section>
-        <p14:section name="Registers" id="{323e9de8-f707-c65b-b9eb-3e5d0b070f5d}">
+        <p14:section name="Registers" id="{aa3327e0-6855-bb07-4f61-30e1f8c8ff46}">
           <p14:sldIdLst>
             <p14:sldId id="263"/>
             <p14:sldId id="264"/>
@@ -149,18 +149,18 @@
             <p14:sldId id="266"/>
           </p14:sldIdLst>
         </p14:section>
-        <p14:section name="The stack" id="{a4c45f8f-289f-fdec-866e-41c527ef042b}">
+        <p14:section name="The stack" id="{2b80df95-07e0-f5b2-484e-e22def0b325c}">
           <p14:sldIdLst>
             <p14:sldId id="267"/>
           </p14:sldIdLst>
         </p14:section>
-        <p14:section name="Processor models" id="{7ddabd97-c8cc-17f8-aba4-0c0b29ba0fe1}">
+        <p14:section name="Processor models" id="{d0ff31fb-c547-a56d-bb04-9132a7acfe6c}">
           <p14:sldIdLst>
             <p14:sldId id="268"/>
             <p14:sldId id="269"/>
           </p14:sldIdLst>
         </p14:section>
-        <p14:section name="The ALU and the whole picture" id="{dc96d2f3-f1db-aa7c-15af-5c6d9c7dad42}">
+        <p14:section name="The ALU and the whole picture" id="{bce8b891-d0e5-5cea-08d1-c096764db47f}">
           <p14:sldIdLst>
             <p14:sldId id="270"/>
             <p14:sldId id="271"/>
@@ -575,6 +575,8 @@
             <a:r>
               <a:rPr lang="en-US" dirty="0"/>
               <a:t>The last block of the course opens the machine that has been running your programs. This lecture presents the processor twice: first as a general model, valid for every processor, with its control unit, registers, stack and arithmetic unit; then as RISC-V, the processor you have programmed since the first days. Each abstract element of the model already has, for you, a familiar name. The ring of the quotation is the processor itself: the one component that commands all the others.
+Learning status: UNDERSTAND NOW, by the end of this lecture you explain it, trace it and apply it on your own; USE NOW, you follow and use the recipe today; how it works inside is explained later, or is not part of the course; UNDERSTAND LATER, recognise the name and what it is for; a later lecture explains it. A slide without a badge is context: a story, an example, a question, an exercise.
+Learning status of this lecture. UNDERSTAND NOW: accumulator, stack, registers; the processor model; the registers of RISC-V; the calling convention; the stack; the RV32 processor. USE NOW: the complete program, the PRG32 tools (used, not studied, in this course). UNDERSTAND LATER: interrupts and traps (Lecture 19). A slide without a badge is context: a story, an example, a question, an exercise.
 For the lecturer: The original deck presented a general processor model and ended with the architecture of the Motorola MC68000. Here the general model is kept and RISC-V (RV32IMAC, as on the ESP32-C6 of the PRG32 kit) is the reference: the students have programmed it since the first days, so every abstract element has a name they already know.</a:t>
             </a:r>
             <a:endParaRPr lang="en-US" dirty="0"/>
@@ -664,6 +666,7 @@
             <a:r>
               <a:rPr lang="en-US" dirty="0"/>
               <a:t>Many processors have a status register whose bits, the flags, record the outcome of the last operation: zero, negative, overflow, carry. An instruction sets them, and a later conditional branch tests them. RISC-V has none. A branch compares two registers and jumps, all in one instruction; slt writes the result of a comparison in an ordinary register; carry and overflow are computed when needed, as in Lecture 05. Less hidden state means a simpler processor and simpler interrupts.
+UNDERSTAND NOW: the registers of RISC-V.
 For the lecturer: Registro di stato. The original deck listed Z, N, P (positive), V, C and a parity bit.</a:t>
             </a:r>
             <a:endParaRPr lang="en-US" dirty="0"/>
@@ -753,6 +756,7 @@
             <a:r>
               <a:rPr lang="en-US" dirty="0"/>
               <a:t>The special registers of RISC-V are the control and status registers, CSRs: a separate bank, read and written only by privileged code with dedicated instructions. Five are worth knowing by name: mstatus, with the global interrupt enable; mtvec, the address of the routine that handles traps; mepc, the address of the interrupted instruction; mcause, the reason for the trap; and the pair mie and mip, with one bit per source of interrupt. The next lecture uses them all.
+UNDERSTAND NOW: the registers of RISC-V. UNDERSTAND LATER: interrupts and traps (studied in Lecture 19).
 For the lecturer: Control and status registers: a separate bank of up to 4,096 registers, read and written only with the instructions csrrw, csrrs and csrrc, and only by privileged code. They are the 'registers of the interrupts' of the general model, and the subject of Lecture 19.</a:t>
             </a:r>
             <a:endParaRPr lang="en-US" dirty="0"/>
@@ -842,6 +846,7 @@
             <a:r>
               <a:rPr lang="en-US" dirty="0"/>
               <a:t>A stack has two operations: push stores an element on top of the pile, pop removes the element on top. It always works on the top, so there is no need to say where: last in, first out. It is used to set aside the contents of registers that must be freed for a task and to restore them afterwards. It is implemented with a pointer that indicates the last element. Careful programs check for overflow on a push and for an empty stack on a pop.
+UNDERSTAND NOW: the stack; the calling convention.
 For the lecturer: LIFO, last in, first out. You have used it since Lecture 02 to save ra.</a:t>
             </a:r>
             <a:endParaRPr lang="en-US" dirty="0"/>
@@ -931,6 +936,7 @@
             <a:r>
               <a:rPr lang="en-US" dirty="0"/>
               <a:t>Four architectures. With general registers the processor has a set of interchangeable registers. With an accumulator, arithmetic instructions have an implicit operand, one special register. In a stack machine there are neither, only a stack pointer, and instructions work on the top of the stack. An orthogonal architecture has a single bank of general registers, some of which also serve as stack pointer or in other special roles. RISC-V is of this last kind.
+UNDERSTAND NOW: accumulator, stack, registers.
 For the lecturer: Modello a registri generici, ad accumulatore, a stack; architetture ortogonali. The original definition of orthogonal mentions a status register too; RISC-V is orthogonal and has not even that.</a:t>
             </a:r>
             <a:endParaRPr lang="en-US" dirty="0"/>
@@ -1020,6 +1026,7 @@
             <a:r>
               <a:rPr lang="en-US" dirty="0"/>
               <a:t>RISC-V is a load-store processor with general registers. Only loads and stores touch memory; every other instruction works from register to register, which is faster. Instructions have three operands, two sources and a destination, so that no value is destroyed unless you want it to be. Each instruction does one simple thing and has a fixed size, which makes it easy to decode and to execute in a pipeline. This is what RISC means. The seven lines of the warm-up are the price, and the simplicity of each line is the gain.
+UNDERSTAND NOW: accumulator, stack, registers.
 For the lecturer: Register-to-register: [REGX] + [REGY] gives [REGZ]. The memory-to-register and register-to-memory forms of the original deck exist in CISC processors and are exactly what RISC gives up.</a:t>
             </a:r>
             <a:endParaRPr lang="en-US" dirty="0"/>
@@ -1109,6 +1116,7 @@
             <a:r>
               <a:rPr lang="en-US" dirty="0"/>
               <a:t>The block diagram of an RV32 processor, from left to right. The PC gives the address of the instruction. The instruction is fetched from memory. The decoder separates its fields and the control unit issues the commands. The register file provides the operands. The ALU computes, or forms an address. The data memory is read or written by loads and stores. Two paths go back: the result returns to the register named by rd, and the next value of the PC is PC plus 4 or the target of a branch. Every instruction you write travels along this path.
+UNDERSTAND NOW: the RV32 processor.
 For the lecturer: The classic single-cycle RISC-V datapath of Patterson and Hennessy, reduced to its blocks; instruction memory and data memory are the same address space, drawn twice for clarity. It replaces the slide 'Architettura del processore MC68000'.</a:t>
             </a:r>
             <a:endParaRPr lang="en-US" dirty="0"/>
@@ -1198,6 +1206,7 @@
             <a:r>
               <a:rPr lang="en-US" dirty="0"/>
               <a:t>The processor of the kit, in numbers: instruction set RV32IMAC; one main core at up to 160 MHz with a four-stage pipeline, and a second low-power core; machine and user modes; no floating point; 512 KB of SRAM, 320 KB of ROM and an external flash; radios and peripherals on the same chip. A complete computer in a few square millimetres, for about two euros: processor, memory and input/output are all there, as in the model.
+UNDERSTAND NOW: the RV32 processor.
 For the lecturer: From the Espressif ESP32-C6 datasheet. A complete computer on a chip of a few square millimetres that costs about two euros: processor, memory and input/output are all there, as in the model of the first slides.</a:t>
             </a:r>
             <a:endParaRPr lang="en-US" dirty="0"/>
@@ -1645,6 +1654,7 @@
             <a:r>
               <a:rPr lang="en-US" dirty="0"/>
               <a:t>Five conclusions. The processor commands and controls, relying on memory and on input/output. Registers are storage locations, inside or outside the processor. The kinds of registers and their use determine the model: accumulator, stack, general registers. The ALU carries out the operations. And RISC-V is a load-store processor with general registers, no flags and no I/O instructions: few elements, each one simple. The next lecture follows an instruction through its whole life.
+Learning status, recap. UNDERSTAND NOW: accumulator, stack, registers; the processor model; the registers of RISC-V; the calling convention; the stack; the RV32 processor. USE NOW: the complete program, the PRG32 tools (used, not studied, in this course). UNDERSTAND LATER: interrupts and traps (Lecture 19). A slide without a badge is context: a story, an example, a question, an exercise.
 For the lecturer: Next lecture: instructions and interrupts.</a:t>
             </a:r>
             <a:endParaRPr lang="en-US" dirty="0"/>
@@ -1734,6 +1744,7 @@
             <a:r>
               <a:rPr lang="en-US" dirty="0"/>
               <a:t>A reminder and a definition. A computer has three subsystems, processor, main memory and input/output, connected by buses. The processor can execute only a fixed set of instructions, from a few tens to a few hundred, and machine language is the set of strings of bits that encode them. Instructions request two kinds of things: transfers of information and arithmetic or logic operations. Both programs and data are in the main memory.
+UNDERSTAND NOW: the processor model.
 For the lecturer: RV32I, the base of RISC-V, has about forty instructions; with the M, A and C extensions of the kit, about a hundred encodings. The Motorola 68000 had fifty-six instruction types with many variants each.</a:t>
             </a:r>
             <a:endParaRPr lang="en-US" dirty="0"/>
@@ -1823,6 +1834,7 @@
             <a:r>
               <a:rPr lang="en-US" dirty="0"/>
               <a:t>The reference model. The control unit contains the program counter, which holds the address of the next instruction, a decoding register, which holds the instruction being executed, and the network that issues the commands. The machine registers R0 to Rn-1 are those the programmer uses. The arithmetic logic unit has two operand registers and a result register. Two pairs of registers link the processor to the outside: MA and MB towards memory, RI and RU towards input and output. An internal bus connects everything.
+UNDERSTAND NOW: the processor model.
 For the lecturer: Modello di riferimento. Although based on the same logical scheme, and so made of rather similar components, the processors on the market can be very different from one another.</a:t>
             </a:r>
             <a:endParaRPr lang="en-US" dirty="0"/>
@@ -1912,6 +1924,7 @@
             <a:r>
               <a:rPr lang="en-US" dirty="0"/>
               <a:t>Each element of the model, and what it is in RISC-V. The program counter is pc. The machine registers are x0 to x31, with the names you know. The registers of the ALU and those towards memory exist in the hardware but are invisible to the programmer. Two rows say "absent", and they are deliberate choices: there are no registers for input and output, because devices are memory-mapped, and there is no status register with flags. The special registers are the CSRs, reserved for privileged software.
+UNDERSTAND NOW: the processor model.
 For the lecturer: The two 'absent' rows are deliberate simplifications of RISC-V, explained later in this lecture and in Lecture 15. The MC68000 of the original deck had all the elements of the model: eight data and eight address registers, a status register with condition codes, and separate interrupt circuitry.</a:t>
             </a:r>
             <a:endParaRPr lang="en-US" dirty="0"/>
@@ -2001,6 +2014,7 @@
             <a:r>
               <a:rPr lang="en-US" dirty="0"/>
               <a:t>Two classes of registers. Internal registers are necessary for the processor to work but are not visible to the programmer: the program counter, the registers towards memory, those of the ALU. Machine registers define the programming model: they are the ones named in instructions. The processor handles three kinds of information, instructions, addresses and data, and each could have its own size. In RV32 all three are 32 bits wide, which makes the machine very regular.
+UNDERSTAND NOW: the processor model.
 For the lecturer: Tipi di dato del processore. The '32' of RV32 is the width of the registers; RV64 has 64-bit registers and addresses and the same 32-bit instructions.</a:t>
             </a:r>
             <a:endParaRPr lang="en-US" dirty="0"/>
@@ -2090,6 +2104,7 @@
             <a:r>
               <a:rPr lang="en-US" dirty="0"/>
               <a:t>A processor has at least two states of operation. In supervisor state it runs the operating system and may execute every instruction. In user state it runs an ordinary program and may execute everything except the privileged instructions, those that could compromise the system. RISC-V calls them modes: machine mode, the most privileged and the only mandatory one, supervisor mode and user mode. The chip of the kit has machine and user. Passing from one to the other happens through the traps of the next lecture.
+UNDERSTAND NOW: the processor model. UNDERSTAND LATER: interrupts and traps (studied in Lecture 19).
 For the lecturer: Stato utente o stato supervisore. RISC-V defines three privilege modes: M, the most privileged and the only mandatory one, runs firmware; S runs the kernel of an operating system such as Linux; U runs applications. The ESP32-C6 implements M and U. Changing mode happens through traps (Lecture 19).</a:t>
             </a:r>
             <a:endParaRPr lang="en-US" dirty="0"/>
@@ -2179,6 +2194,7 @@
             <a:r>
               <a:rPr lang="en-US" dirty="0"/>
               <a:t>Five functions of registers. Transit: carrying data between memory and registers. Accumulation: holding the operands and the results of arithmetic. Addressing: holding an address or part of one, as base and index registers do. Stack pointer: indicating the top of a stack in memory. Flags: single bits that record events such as zero, sign, overflow and carry, to condition later instructions. In RISC-V the general registers serve the first four functions; the fifth does not exist as a register.
+UNDERSTAND NOW: the registers of RISC-V.
 For the lecturer: Funzione dei registri. In RISC-V the first four functions are all served by the general registers; the fifth does not exist as a register.</a:t>
             </a:r>
             <a:endParaRPr lang="en-US" dirty="0"/>
@@ -2268,6 +2284,7 @@
             <a:r>
               <a:rPr lang="en-US" dirty="0"/>
               <a:t>The complete table of the registers of RISC-V, with numbers, names and roles. You have used most of them: zero, ra, sp, the temporaries t0 to t6, the arguments a0 to a7, the saved registers s0 to s11. Two are new: gp and tp, used by compilers and operating systems. The hardware treats x1 to x31 identically; only x0 is special. The roles come from the calling convention. The program counter is not in the bank.
+UNDERSTAND NOW: the registers of RISC-V; the calling convention.
 For the lecturer: The hardware treats x1 to x31 identically; only x0 is special. The roles come from the calling convention (Lecture 02). The MC68000 instead separated data registers D0-D7 from address registers A0-A7, with A7 as stack pointer.</a:t>
             </a:r>
             <a:endParaRPr lang="en-US" dirty="0"/>
@@ -3405,6 +3422,420 @@
       </p:pic>
       <p:sp>
         <p:nvSpPr>
+          <p:cNvPr id="15" name="Shape 12"/>
+          <p:cNvSpPr/>
+          <p:nvPr/>
+        </p:nvSpPr>
+        <p:spPr>
+          <a:xfrm>
+            <a:off x="9690303" y="91440"/>
+            <a:ext cx="1952752" cy="274320"/>
+          </a:xfrm>
+          <a:prstGeom prst="rect">
+            <a:avLst/>
+          </a:prstGeom>
+          <a:solidFill>
+            <a:srgbClr val="F3E8FF"/>
+          </a:solidFill>
+          <a:ln w="12700">
+            <a:solidFill>
+              <a:srgbClr val="7E22CE"/>
+            </a:solidFill>
+            <a:prstDash val="dash"/>
+          </a:ln>
+        </p:spPr>
+      </p:sp>
+      <p:sp>
+        <p:nvSpPr>
+          <p:cNvPr id="16" name="Shape 13"/>
+          <p:cNvSpPr/>
+          <p:nvPr/>
+        </p:nvSpPr>
+        <p:spPr>
+          <a:xfrm>
+            <a:off x="9717735" y="128016"/>
+            <a:ext cx="45720" cy="45720"/>
+          </a:xfrm>
+          <a:prstGeom prst="rect">
+            <a:avLst/>
+          </a:prstGeom>
+          <a:solidFill>
+            <a:srgbClr val="7E22CE"/>
+          </a:solidFill>
+          <a:ln w="12700">
+            <a:solidFill>
+              <a:srgbClr val="7E22CE"/>
+            </a:solidFill>
+            <a:prstDash val="solid"/>
+          </a:ln>
+        </p:spPr>
+      </p:sp>
+      <p:sp>
+        <p:nvSpPr>
+          <p:cNvPr id="17" name="Shape 14"/>
+          <p:cNvSpPr/>
+          <p:nvPr/>
+        </p:nvSpPr>
+        <p:spPr>
+          <a:xfrm>
+            <a:off x="9717735" y="205740"/>
+            <a:ext cx="45720" cy="45720"/>
+          </a:xfrm>
+          <a:prstGeom prst="rect">
+            <a:avLst/>
+          </a:prstGeom>
+          <a:solidFill>
+            <a:srgbClr val="7E22CE"/>
+          </a:solidFill>
+          <a:ln w="12700">
+            <a:solidFill>
+              <a:srgbClr val="7E22CE"/>
+            </a:solidFill>
+            <a:prstDash val="solid"/>
+          </a:ln>
+        </p:spPr>
+      </p:sp>
+      <p:sp>
+        <p:nvSpPr>
+          <p:cNvPr id="18" name="Shape 15"/>
+          <p:cNvSpPr/>
+          <p:nvPr/>
+        </p:nvSpPr>
+        <p:spPr>
+          <a:xfrm>
+            <a:off x="9717735" y="283464"/>
+            <a:ext cx="45720" cy="45720"/>
+          </a:xfrm>
+          <a:prstGeom prst="rect">
+            <a:avLst/>
+          </a:prstGeom>
+          <a:solidFill>
+            <a:srgbClr val="7E22CE"/>
+          </a:solidFill>
+          <a:ln w="12700">
+            <a:solidFill>
+              <a:srgbClr val="7E22CE"/>
+            </a:solidFill>
+            <a:prstDash val="solid"/>
+          </a:ln>
+        </p:spPr>
+      </p:sp>
+      <p:pic>
+        <p:nvPicPr>
+          <p:cNvPr id="19" name="Image 1" descr="preencoded.png">    </p:cNvPr>
+          <p:cNvPicPr>
+            <a:picLocks noChangeAspect="1"/>
+          </p:cNvPicPr>
+          <p:nvPr/>
+        </p:nvPicPr>
+        <p:blipFill>
+          <a:blip r:embed="rId2"/>
+          <a:stretch>
+            <a:fillRect/>
+          </a:stretch>
+        </p:blipFill>
+        <p:spPr>
+          <a:xfrm>
+            <a:off x="9818319" y="128016"/>
+            <a:ext cx="201168" cy="201168"/>
+          </a:xfrm>
+          <a:prstGeom prst="rect">
+            <a:avLst/>
+          </a:prstGeom>
+        </p:spPr>
+      </p:pic>
+      <p:sp>
+        <p:nvSpPr>
+          <p:cNvPr id="20" name="Text 16"/>
+          <p:cNvSpPr txBox="1"/>
+          <p:nvPr/>
+        </p:nvSpPr>
+        <p:spPr>
+          <a:xfrm>
+            <a:off x="10074351" y="91440"/>
+            <a:ext cx="1532128" cy="274320"/>
+          </a:xfrm>
+          <a:prstGeom prst="rect">
+            <a:avLst/>
+          </a:prstGeom>
+          <a:noFill/>
+          <a:ln/>
+        </p:spPr>
+        <p:txBody>
+          <a:bodyPr wrap="square" lIns="0" tIns="0" rIns="0" bIns="0" rtlCol="0" anchor="ctr"/>
+          <a:lstStyle/>
+          <a:p>
+            <a:pPr indent="0" marL="0">
+              <a:buNone/>
+            </a:pPr>
+            <a:r>
+              <a:rPr lang="en-US" sz="1100" b="1" dirty="0">
+                <a:solidFill>
+                  <a:srgbClr val="6B21A8"/>
+                </a:solidFill>
+                <a:latin typeface="Calibri" pitchFamily="34" charset="0"/>
+                <a:ea typeface="Calibri" pitchFamily="34" charset="-122"/>
+                <a:cs typeface="Calibri" pitchFamily="34" charset="-120"/>
+              </a:rPr>
+              <a:t>UNDERSTAND LATER</a:t>
+            </a:r>
+            <a:endParaRPr lang="en-US" sz="1100" dirty="0"/>
+          </a:p>
+        </p:txBody>
+      </p:sp>
+      <p:sp>
+        <p:nvSpPr>
+          <p:cNvPr id="21" name="Shape 17"/>
+          <p:cNvSpPr/>
+          <p:nvPr/>
+        </p:nvSpPr>
+        <p:spPr>
+          <a:xfrm>
+            <a:off x="8407349" y="91440"/>
+            <a:ext cx="1173226" cy="274320"/>
+          </a:xfrm>
+          <a:prstGeom prst="rect">
+            <a:avLst/>
+          </a:prstGeom>
+          <a:solidFill>
+            <a:srgbClr val="FEF3C7"/>
+          </a:solidFill>
+          <a:ln w="12700">
+            <a:solidFill>
+              <a:srgbClr val="B45309"/>
+            </a:solidFill>
+            <a:prstDash val="solid"/>
+          </a:ln>
+        </p:spPr>
+      </p:sp>
+      <p:sp>
+        <p:nvSpPr>
+          <p:cNvPr id="22" name="Shape 18"/>
+          <p:cNvSpPr/>
+          <p:nvPr/>
+        </p:nvSpPr>
+        <p:spPr>
+          <a:xfrm>
+            <a:off x="8407349" y="91440"/>
+            <a:ext cx="27432" cy="274320"/>
+          </a:xfrm>
+          <a:prstGeom prst="rect">
+            <a:avLst/>
+          </a:prstGeom>
+          <a:solidFill>
+            <a:srgbClr val="B45309"/>
+          </a:solidFill>
+          <a:ln w="12700">
+            <a:solidFill>
+              <a:srgbClr val="B45309"/>
+            </a:solidFill>
+            <a:prstDash val="solid"/>
+          </a:ln>
+        </p:spPr>
+      </p:sp>
+      <p:sp>
+        <p:nvSpPr>
+          <p:cNvPr id="23" name="Shape 19"/>
+          <p:cNvSpPr/>
+          <p:nvPr/>
+        </p:nvSpPr>
+        <p:spPr>
+          <a:xfrm>
+            <a:off x="8462213" y="91440"/>
+            <a:ext cx="27432" cy="274320"/>
+          </a:xfrm>
+          <a:prstGeom prst="rect">
+            <a:avLst/>
+          </a:prstGeom>
+          <a:solidFill>
+            <a:srgbClr val="B45309"/>
+          </a:solidFill>
+          <a:ln w="12700">
+            <a:solidFill>
+              <a:srgbClr val="B45309"/>
+            </a:solidFill>
+            <a:prstDash val="solid"/>
+          </a:ln>
+        </p:spPr>
+      </p:sp>
+      <p:pic>
+        <p:nvPicPr>
+          <p:cNvPr id="24" name="Image 2" descr="preencoded.png">    </p:cNvPr>
+          <p:cNvPicPr>
+            <a:picLocks noChangeAspect="1"/>
+          </p:cNvPicPr>
+          <p:nvPr/>
+        </p:nvPicPr>
+        <p:blipFill>
+          <a:blip r:embed="rId3"/>
+          <a:stretch>
+            <a:fillRect/>
+          </a:stretch>
+        </p:blipFill>
+        <p:spPr>
+          <a:xfrm>
+            <a:off x="8535365" y="128016"/>
+            <a:ext cx="201168" cy="201168"/>
+          </a:xfrm>
+          <a:prstGeom prst="rect">
+            <a:avLst/>
+          </a:prstGeom>
+        </p:spPr>
+      </p:pic>
+      <p:sp>
+        <p:nvSpPr>
+          <p:cNvPr id="25" name="Text 20"/>
+          <p:cNvSpPr txBox="1"/>
+          <p:nvPr/>
+        </p:nvSpPr>
+        <p:spPr>
+          <a:xfrm>
+            <a:off x="8791397" y="91440"/>
+            <a:ext cx="752602" cy="274320"/>
+          </a:xfrm>
+          <a:prstGeom prst="rect">
+            <a:avLst/>
+          </a:prstGeom>
+          <a:noFill/>
+          <a:ln/>
+        </p:spPr>
+        <p:txBody>
+          <a:bodyPr wrap="square" lIns="0" tIns="0" rIns="0" bIns="0" rtlCol="0" anchor="ctr"/>
+          <a:lstStyle/>
+          <a:p>
+            <a:pPr indent="0" marL="0">
+              <a:buNone/>
+            </a:pPr>
+            <a:r>
+              <a:rPr lang="en-US" sz="1100" b="1" dirty="0">
+                <a:solidFill>
+                  <a:srgbClr val="92400E"/>
+                </a:solidFill>
+                <a:latin typeface="Calibri" pitchFamily="34" charset="0"/>
+                <a:ea typeface="Calibri" pitchFamily="34" charset="-122"/>
+                <a:cs typeface="Calibri" pitchFamily="34" charset="-120"/>
+              </a:rPr>
+              <a:t>USE NOW</a:t>
+            </a:r>
+            <a:endParaRPr lang="en-US" sz="1100" dirty="0"/>
+          </a:p>
+        </p:txBody>
+      </p:sp>
+      <p:sp>
+        <p:nvSpPr>
+          <p:cNvPr id="26" name="Shape 21"/>
+          <p:cNvSpPr/>
+          <p:nvPr/>
+        </p:nvSpPr>
+        <p:spPr>
+          <a:xfrm>
+            <a:off x="6518097" y="91440"/>
+            <a:ext cx="1779524" cy="274320"/>
+          </a:xfrm>
+          <a:prstGeom prst="rect">
+            <a:avLst/>
+          </a:prstGeom>
+          <a:solidFill>
+            <a:srgbClr val="E0F2FE"/>
+          </a:solidFill>
+          <a:ln w="12700">
+            <a:solidFill>
+              <a:srgbClr val="0369A1"/>
+            </a:solidFill>
+            <a:prstDash val="solid"/>
+          </a:ln>
+        </p:spPr>
+      </p:sp>
+      <p:sp>
+        <p:nvSpPr>
+          <p:cNvPr id="27" name="Shape 22"/>
+          <p:cNvSpPr/>
+          <p:nvPr/>
+        </p:nvSpPr>
+        <p:spPr>
+          <a:xfrm>
+            <a:off x="6518097" y="91440"/>
+            <a:ext cx="73152" cy="274320"/>
+          </a:xfrm>
+          <a:prstGeom prst="rect">
+            <a:avLst/>
+          </a:prstGeom>
+          <a:solidFill>
+            <a:srgbClr val="0369A1"/>
+          </a:solidFill>
+          <a:ln w="12700">
+            <a:solidFill>
+              <a:srgbClr val="0369A1"/>
+            </a:solidFill>
+            <a:prstDash val="solid"/>
+          </a:ln>
+        </p:spPr>
+      </p:sp>
+      <p:pic>
+        <p:nvPicPr>
+          <p:cNvPr id="28" name="Image 3" descr="preencoded.png">    </p:cNvPr>
+          <p:cNvPicPr>
+            <a:picLocks noChangeAspect="1"/>
+          </p:cNvPicPr>
+          <p:nvPr/>
+        </p:nvPicPr>
+        <p:blipFill>
+          <a:blip r:embed="rId4"/>
+          <a:stretch>
+            <a:fillRect/>
+          </a:stretch>
+        </p:blipFill>
+        <p:spPr>
+          <a:xfrm>
+            <a:off x="6646113" y="128016"/>
+            <a:ext cx="201168" cy="201168"/>
+          </a:xfrm>
+          <a:prstGeom prst="rect">
+            <a:avLst/>
+          </a:prstGeom>
+        </p:spPr>
+      </p:pic>
+      <p:sp>
+        <p:nvSpPr>
+          <p:cNvPr id="29" name="Text 23"/>
+          <p:cNvSpPr txBox="1"/>
+          <p:nvPr/>
+        </p:nvSpPr>
+        <p:spPr>
+          <a:xfrm>
+            <a:off x="6902145" y="91440"/>
+            <a:ext cx="1358900" cy="274320"/>
+          </a:xfrm>
+          <a:prstGeom prst="rect">
+            <a:avLst/>
+          </a:prstGeom>
+          <a:noFill/>
+          <a:ln/>
+        </p:spPr>
+        <p:txBody>
+          <a:bodyPr wrap="square" lIns="0" tIns="0" rIns="0" bIns="0" rtlCol="0" anchor="ctr"/>
+          <a:lstStyle/>
+          <a:p>
+            <a:pPr indent="0" marL="0">
+              <a:buNone/>
+            </a:pPr>
+            <a:r>
+              <a:rPr lang="en-US" sz="1100" b="1" dirty="0">
+                <a:solidFill>
+                  <a:srgbClr val="075985"/>
+                </a:solidFill>
+                <a:latin typeface="Calibri" pitchFamily="34" charset="0"/>
+                <a:ea typeface="Calibri" pitchFamily="34" charset="-122"/>
+                <a:cs typeface="Calibri" pitchFamily="34" charset="-120"/>
+              </a:rPr>
+              <a:t>UNDERSTAND NOW</a:t>
+            </a:r>
+            <a:endParaRPr lang="en-US" sz="1100" dirty="0"/>
+          </a:p>
+        </p:txBody>
+      </p:sp>
+      <p:sp>
+        <p:nvSpPr>
           <p:cNvPr id="25" name="Slide Number Placeholder 0"/>
           <p:cNvSpPr>
             <a:spLocks noGrp="1"/>
@@ -3874,6 +4305,133 @@
               <a:t>Less hidden state: simpler pipelines, simpler interrupts</a:t>
             </a:r>
             <a:endParaRPr lang="en-US" sz="2000" dirty="0"/>
+          </a:p>
+        </p:txBody>
+      </p:sp>
+      <p:sp>
+        <p:nvSpPr>
+          <p:cNvPr id="9" name="Shape 7"/>
+          <p:cNvSpPr/>
+          <p:nvPr/>
+        </p:nvSpPr>
+        <p:spPr>
+          <a:xfrm>
+            <a:off x="8156397" y="91440"/>
+            <a:ext cx="3486658" cy="274320"/>
+          </a:xfrm>
+          <a:prstGeom prst="rect">
+            <a:avLst/>
+          </a:prstGeom>
+          <a:solidFill>
+            <a:srgbClr val="E0F2FE"/>
+          </a:solidFill>
+          <a:ln w="12700">
+            <a:solidFill>
+              <a:srgbClr val="0369A1"/>
+            </a:solidFill>
+            <a:prstDash val="solid"/>
+          </a:ln>
+        </p:spPr>
+      </p:sp>
+      <p:sp>
+        <p:nvSpPr>
+          <p:cNvPr id="10" name="Shape 8"/>
+          <p:cNvSpPr/>
+          <p:nvPr/>
+        </p:nvSpPr>
+        <p:spPr>
+          <a:xfrm>
+            <a:off x="8156397" y="91440"/>
+            <a:ext cx="73152" cy="274320"/>
+          </a:xfrm>
+          <a:prstGeom prst="rect">
+            <a:avLst/>
+          </a:prstGeom>
+          <a:solidFill>
+            <a:srgbClr val="0369A1"/>
+          </a:solidFill>
+          <a:ln w="12700">
+            <a:solidFill>
+              <a:srgbClr val="0369A1"/>
+            </a:solidFill>
+            <a:prstDash val="solid"/>
+          </a:ln>
+        </p:spPr>
+      </p:sp>
+      <p:pic>
+        <p:nvPicPr>
+          <p:cNvPr id="11" name="Image 0" descr="preencoded.png">    </p:cNvPr>
+          <p:cNvPicPr>
+            <a:picLocks noChangeAspect="1"/>
+          </p:cNvPicPr>
+          <p:nvPr/>
+        </p:nvPicPr>
+        <p:blipFill>
+          <a:blip r:embed="rId1"/>
+          <a:stretch>
+            <a:fillRect/>
+          </a:stretch>
+        </p:blipFill>
+        <p:spPr>
+          <a:xfrm>
+            <a:off x="8284413" y="128016"/>
+            <a:ext cx="201168" cy="201168"/>
+          </a:xfrm>
+          <a:prstGeom prst="rect">
+            <a:avLst/>
+          </a:prstGeom>
+        </p:spPr>
+      </p:pic>
+      <p:sp>
+        <p:nvSpPr>
+          <p:cNvPr id="12" name="Text 9"/>
+          <p:cNvSpPr txBox="1"/>
+          <p:nvPr/>
+        </p:nvSpPr>
+        <p:spPr>
+          <a:xfrm>
+            <a:off x="8540445" y="91440"/>
+            <a:ext cx="3066034" cy="274320"/>
+          </a:xfrm>
+          <a:prstGeom prst="rect">
+            <a:avLst/>
+          </a:prstGeom>
+          <a:noFill/>
+          <a:ln/>
+        </p:spPr>
+        <p:txBody>
+          <a:bodyPr wrap="square" lIns="0" tIns="0" rIns="0" bIns="0" rtlCol="0" anchor="ctr"/>
+          <a:lstStyle/>
+          <a:p>
+            <a:pPr indent="0" marL="0">
+              <a:buNone/>
+            </a:pPr>
+            <a:r>
+              <a:rPr lang="en-US" sz="1100" b="1" dirty="0">
+                <a:solidFill>
+                  <a:srgbClr val="075985"/>
+                </a:solidFill>
+                <a:latin typeface="Calibri" pitchFamily="34" charset="0"/>
+                <a:ea typeface="Calibri" pitchFamily="34" charset="-122"/>
+                <a:cs typeface="Calibri" pitchFamily="34" charset="-120"/>
+              </a:rPr>
+              <a:t>UNDERSTAND NOW</a:t>
+            </a:r>
+            <a:pPr indent="0" marL="0">
+              <a:buNone/>
+            </a:pPr>
+            <a:r>
+              <a:rPr lang="en-US" sz="1100" dirty="0">
+                <a:solidFill>
+                  <a:srgbClr val="075985"/>
+                </a:solidFill>
+                <a:latin typeface="Calibri" pitchFamily="34" charset="0"/>
+                <a:ea typeface="Calibri" pitchFamily="34" charset="-122"/>
+                <a:cs typeface="Calibri" pitchFamily="34" charset="-120"/>
+              </a:rPr>
+              <a:t> · the registers of RISC-V</a:t>
+            </a:r>
+            <a:endParaRPr lang="en-US" sz="1100" dirty="0"/>
           </a:p>
         </p:txBody>
       </p:sp>
@@ -5260,6 +5818,324 @@
       </p:graphicFrame>
       <p:sp>
         <p:nvSpPr>
+          <p:cNvPr id="4" name="Shape 1"/>
+          <p:cNvSpPr/>
+          <p:nvPr/>
+        </p:nvSpPr>
+        <p:spPr>
+          <a:xfrm>
+            <a:off x="7217613" y="91440"/>
+            <a:ext cx="4425442" cy="274320"/>
+          </a:xfrm>
+          <a:prstGeom prst="rect">
+            <a:avLst/>
+          </a:prstGeom>
+          <a:solidFill>
+            <a:srgbClr val="F3E8FF"/>
+          </a:solidFill>
+          <a:ln w="12700">
+            <a:solidFill>
+              <a:srgbClr val="7E22CE"/>
+            </a:solidFill>
+            <a:prstDash val="dash"/>
+          </a:ln>
+        </p:spPr>
+      </p:sp>
+      <p:sp>
+        <p:nvSpPr>
+          <p:cNvPr id="5" name="Shape 2"/>
+          <p:cNvSpPr/>
+          <p:nvPr/>
+        </p:nvSpPr>
+        <p:spPr>
+          <a:xfrm>
+            <a:off x="7245045" y="128016"/>
+            <a:ext cx="45720" cy="45720"/>
+          </a:xfrm>
+          <a:prstGeom prst="rect">
+            <a:avLst/>
+          </a:prstGeom>
+          <a:solidFill>
+            <a:srgbClr val="7E22CE"/>
+          </a:solidFill>
+          <a:ln w="12700">
+            <a:solidFill>
+              <a:srgbClr val="7E22CE"/>
+            </a:solidFill>
+            <a:prstDash val="solid"/>
+          </a:ln>
+        </p:spPr>
+      </p:sp>
+      <p:sp>
+        <p:nvSpPr>
+          <p:cNvPr id="6" name="Shape 3"/>
+          <p:cNvSpPr/>
+          <p:nvPr/>
+        </p:nvSpPr>
+        <p:spPr>
+          <a:xfrm>
+            <a:off x="7245045" y="205740"/>
+            <a:ext cx="45720" cy="45720"/>
+          </a:xfrm>
+          <a:prstGeom prst="rect">
+            <a:avLst/>
+          </a:prstGeom>
+          <a:solidFill>
+            <a:srgbClr val="7E22CE"/>
+          </a:solidFill>
+          <a:ln w="12700">
+            <a:solidFill>
+              <a:srgbClr val="7E22CE"/>
+            </a:solidFill>
+            <a:prstDash val="solid"/>
+          </a:ln>
+        </p:spPr>
+      </p:sp>
+      <p:sp>
+        <p:nvSpPr>
+          <p:cNvPr id="7" name="Shape 4"/>
+          <p:cNvSpPr/>
+          <p:nvPr/>
+        </p:nvSpPr>
+        <p:spPr>
+          <a:xfrm>
+            <a:off x="7245045" y="283464"/>
+            <a:ext cx="45720" cy="45720"/>
+          </a:xfrm>
+          <a:prstGeom prst="rect">
+            <a:avLst/>
+          </a:prstGeom>
+          <a:solidFill>
+            <a:srgbClr val="7E22CE"/>
+          </a:solidFill>
+          <a:ln w="12700">
+            <a:solidFill>
+              <a:srgbClr val="7E22CE"/>
+            </a:solidFill>
+            <a:prstDash val="solid"/>
+          </a:ln>
+        </p:spPr>
+      </p:sp>
+      <p:pic>
+        <p:nvPicPr>
+          <p:cNvPr id="8" name="Image 0" descr="preencoded.png">    </p:cNvPr>
+          <p:cNvPicPr>
+            <a:picLocks noChangeAspect="1"/>
+          </p:cNvPicPr>
+          <p:nvPr/>
+        </p:nvPicPr>
+        <p:blipFill>
+          <a:blip r:embed="rId1"/>
+          <a:stretch>
+            <a:fillRect/>
+          </a:stretch>
+        </p:blipFill>
+        <p:spPr>
+          <a:xfrm>
+            <a:off x="7345629" y="128016"/>
+            <a:ext cx="201168" cy="201168"/>
+          </a:xfrm>
+          <a:prstGeom prst="rect">
+            <a:avLst/>
+          </a:prstGeom>
+        </p:spPr>
+      </p:pic>
+      <p:sp>
+        <p:nvSpPr>
+          <p:cNvPr id="9" name="Text 5"/>
+          <p:cNvSpPr txBox="1"/>
+          <p:nvPr/>
+        </p:nvSpPr>
+        <p:spPr>
+          <a:xfrm>
+            <a:off x="7601661" y="91440"/>
+            <a:ext cx="4004818" cy="274320"/>
+          </a:xfrm>
+          <a:prstGeom prst="rect">
+            <a:avLst/>
+          </a:prstGeom>
+          <a:noFill/>
+          <a:ln/>
+        </p:spPr>
+        <p:txBody>
+          <a:bodyPr wrap="square" lIns="0" tIns="0" rIns="0" bIns="0" rtlCol="0" anchor="ctr"/>
+          <a:lstStyle/>
+          <a:p>
+            <a:pPr indent="0" marL="0">
+              <a:buNone/>
+            </a:pPr>
+            <a:r>
+              <a:rPr lang="en-US" sz="1100" b="1" dirty="0">
+                <a:solidFill>
+                  <a:srgbClr val="6B21A8"/>
+                </a:solidFill>
+                <a:latin typeface="Calibri" pitchFamily="34" charset="0"/>
+                <a:ea typeface="Calibri" pitchFamily="34" charset="-122"/>
+                <a:cs typeface="Calibri" pitchFamily="34" charset="-120"/>
+              </a:rPr>
+              <a:t>UNDERSTAND LATER</a:t>
+            </a:r>
+            <a:pPr indent="0" marL="0">
+              <a:buNone/>
+            </a:pPr>
+            <a:r>
+              <a:rPr lang="en-US" sz="1100" dirty="0">
+                <a:solidFill>
+                  <a:srgbClr val="6B21A8"/>
+                </a:solidFill>
+                <a:latin typeface="Calibri" pitchFamily="34" charset="0"/>
+                <a:ea typeface="Calibri" pitchFamily="34" charset="-122"/>
+                <a:cs typeface="Calibri" pitchFamily="34" charset="-120"/>
+              </a:rPr>
+              <a:t> · interrupts and traps</a:t>
+            </a:r>
+            <a:pPr indent="0" marL="0">
+              <a:buNone/>
+            </a:pPr>
+            <a:r>
+              <a:rPr lang="en-US" sz="1100" b="1" dirty="0">
+                <a:solidFill>
+                  <a:srgbClr val="6B21A8"/>
+                </a:solidFill>
+                <a:latin typeface="Calibri" pitchFamily="34" charset="0"/>
+                <a:ea typeface="Calibri" pitchFamily="34" charset="-122"/>
+                <a:cs typeface="Calibri" pitchFamily="34" charset="-120"/>
+              </a:rPr>
+              <a:t> → Lecture 19</a:t>
+            </a:r>
+            <a:endParaRPr lang="en-US" sz="1100" dirty="0"/>
+          </a:p>
+        </p:txBody>
+      </p:sp>
+      <p:sp>
+        <p:nvSpPr>
+          <p:cNvPr id="10" name="Shape 6"/>
+          <p:cNvSpPr/>
+          <p:nvPr/>
+        </p:nvSpPr>
+        <p:spPr>
+          <a:xfrm>
+            <a:off x="3621227" y="91440"/>
+            <a:ext cx="3486658" cy="274320"/>
+          </a:xfrm>
+          <a:prstGeom prst="rect">
+            <a:avLst/>
+          </a:prstGeom>
+          <a:solidFill>
+            <a:srgbClr val="E0F2FE"/>
+          </a:solidFill>
+          <a:ln w="12700">
+            <a:solidFill>
+              <a:srgbClr val="0369A1"/>
+            </a:solidFill>
+            <a:prstDash val="solid"/>
+          </a:ln>
+        </p:spPr>
+      </p:sp>
+      <p:sp>
+        <p:nvSpPr>
+          <p:cNvPr id="11" name="Shape 7"/>
+          <p:cNvSpPr/>
+          <p:nvPr/>
+        </p:nvSpPr>
+        <p:spPr>
+          <a:xfrm>
+            <a:off x="3621227" y="91440"/>
+            <a:ext cx="73152" cy="274320"/>
+          </a:xfrm>
+          <a:prstGeom prst="rect">
+            <a:avLst/>
+          </a:prstGeom>
+          <a:solidFill>
+            <a:srgbClr val="0369A1"/>
+          </a:solidFill>
+          <a:ln w="12700">
+            <a:solidFill>
+              <a:srgbClr val="0369A1"/>
+            </a:solidFill>
+            <a:prstDash val="solid"/>
+          </a:ln>
+        </p:spPr>
+      </p:sp>
+      <p:pic>
+        <p:nvPicPr>
+          <p:cNvPr id="12" name="Image 1" descr="preencoded.png">    </p:cNvPr>
+          <p:cNvPicPr>
+            <a:picLocks noChangeAspect="1"/>
+          </p:cNvPicPr>
+          <p:nvPr/>
+        </p:nvPicPr>
+        <p:blipFill>
+          <a:blip r:embed="rId2"/>
+          <a:stretch>
+            <a:fillRect/>
+          </a:stretch>
+        </p:blipFill>
+        <p:spPr>
+          <a:xfrm>
+            <a:off x="3749243" y="128016"/>
+            <a:ext cx="201168" cy="201168"/>
+          </a:xfrm>
+          <a:prstGeom prst="rect">
+            <a:avLst/>
+          </a:prstGeom>
+        </p:spPr>
+      </p:pic>
+      <p:sp>
+        <p:nvSpPr>
+          <p:cNvPr id="13" name="Text 8"/>
+          <p:cNvSpPr txBox="1"/>
+          <p:nvPr/>
+        </p:nvSpPr>
+        <p:spPr>
+          <a:xfrm>
+            <a:off x="4005275" y="91440"/>
+            <a:ext cx="3066034" cy="274320"/>
+          </a:xfrm>
+          <a:prstGeom prst="rect">
+            <a:avLst/>
+          </a:prstGeom>
+          <a:noFill/>
+          <a:ln/>
+        </p:spPr>
+        <p:txBody>
+          <a:bodyPr wrap="square" lIns="0" tIns="0" rIns="0" bIns="0" rtlCol="0" anchor="ctr"/>
+          <a:lstStyle/>
+          <a:p>
+            <a:pPr indent="0" marL="0">
+              <a:buNone/>
+            </a:pPr>
+            <a:r>
+              <a:rPr lang="en-US" sz="1100" b="1" dirty="0">
+                <a:solidFill>
+                  <a:srgbClr val="075985"/>
+                </a:solidFill>
+                <a:latin typeface="Calibri" pitchFamily="34" charset="0"/>
+                <a:ea typeface="Calibri" pitchFamily="34" charset="-122"/>
+                <a:cs typeface="Calibri" pitchFamily="34" charset="-120"/>
+              </a:rPr>
+              <a:t>UNDERSTAND NOW</a:t>
+            </a:r>
+            <a:pPr indent="0" marL="0">
+              <a:buNone/>
+            </a:pPr>
+            <a:r>
+              <a:rPr lang="en-US" sz="1100" dirty="0">
+                <a:solidFill>
+                  <a:srgbClr val="075985"/>
+                </a:solidFill>
+                <a:latin typeface="Calibri" pitchFamily="34" charset="0"/>
+                <a:ea typeface="Calibri" pitchFamily="34" charset="-122"/>
+                <a:cs typeface="Calibri" pitchFamily="34" charset="-120"/>
+              </a:rPr>
+              <a:t> · the registers of RISC-V</a:t>
+            </a:r>
+            <a:endParaRPr lang="en-US" sz="1100" dirty="0"/>
+          </a:p>
+        </p:txBody>
+      </p:sp>
+      <p:sp>
+        <p:nvSpPr>
           <p:cNvPr id="25" name="Slide Number Placeholder 0"/>
           <p:cNvSpPr>
             <a:spLocks noGrp="1"/>
@@ -5814,6 +6690,133 @@
       </p:sp>
       <p:sp>
         <p:nvSpPr>
+          <p:cNvPr id="16" name="Shape 14"/>
+          <p:cNvSpPr/>
+          <p:nvPr/>
+        </p:nvSpPr>
+        <p:spPr>
+          <a:xfrm>
+            <a:off x="9075623" y="91440"/>
+            <a:ext cx="2567432" cy="274320"/>
+          </a:xfrm>
+          <a:prstGeom prst="rect">
+            <a:avLst/>
+          </a:prstGeom>
+          <a:solidFill>
+            <a:srgbClr val="E0F2FE"/>
+          </a:solidFill>
+          <a:ln w="12700">
+            <a:solidFill>
+              <a:srgbClr val="0369A1"/>
+            </a:solidFill>
+            <a:prstDash val="solid"/>
+          </a:ln>
+        </p:spPr>
+      </p:sp>
+      <p:sp>
+        <p:nvSpPr>
+          <p:cNvPr id="17" name="Shape 15"/>
+          <p:cNvSpPr/>
+          <p:nvPr/>
+        </p:nvSpPr>
+        <p:spPr>
+          <a:xfrm>
+            <a:off x="9075623" y="91440"/>
+            <a:ext cx="73152" cy="274320"/>
+          </a:xfrm>
+          <a:prstGeom prst="rect">
+            <a:avLst/>
+          </a:prstGeom>
+          <a:solidFill>
+            <a:srgbClr val="0369A1"/>
+          </a:solidFill>
+          <a:ln w="12700">
+            <a:solidFill>
+              <a:srgbClr val="0369A1"/>
+            </a:solidFill>
+            <a:prstDash val="solid"/>
+          </a:ln>
+        </p:spPr>
+      </p:sp>
+      <p:pic>
+        <p:nvPicPr>
+          <p:cNvPr id="18" name="Image 0" descr="preencoded.png">    </p:cNvPr>
+          <p:cNvPicPr>
+            <a:picLocks noChangeAspect="1"/>
+          </p:cNvPicPr>
+          <p:nvPr/>
+        </p:nvPicPr>
+        <p:blipFill>
+          <a:blip r:embed="rId1"/>
+          <a:stretch>
+            <a:fillRect/>
+          </a:stretch>
+        </p:blipFill>
+        <p:spPr>
+          <a:xfrm>
+            <a:off x="9203639" y="128016"/>
+            <a:ext cx="201168" cy="201168"/>
+          </a:xfrm>
+          <a:prstGeom prst="rect">
+            <a:avLst/>
+          </a:prstGeom>
+        </p:spPr>
+      </p:pic>
+      <p:sp>
+        <p:nvSpPr>
+          <p:cNvPr id="19" name="Text 16"/>
+          <p:cNvSpPr txBox="1"/>
+          <p:nvPr/>
+        </p:nvSpPr>
+        <p:spPr>
+          <a:xfrm>
+            <a:off x="9459671" y="91440"/>
+            <a:ext cx="2146808" cy="274320"/>
+          </a:xfrm>
+          <a:prstGeom prst="rect">
+            <a:avLst/>
+          </a:prstGeom>
+          <a:noFill/>
+          <a:ln/>
+        </p:spPr>
+        <p:txBody>
+          <a:bodyPr wrap="square" lIns="0" tIns="0" rIns="0" bIns="0" rtlCol="0" anchor="ctr"/>
+          <a:lstStyle/>
+          <a:p>
+            <a:pPr indent="0" marL="0">
+              <a:buNone/>
+            </a:pPr>
+            <a:r>
+              <a:rPr lang="en-US" sz="1100" b="1" dirty="0">
+                <a:solidFill>
+                  <a:srgbClr val="075985"/>
+                </a:solidFill>
+                <a:latin typeface="Calibri" pitchFamily="34" charset="0"/>
+                <a:ea typeface="Calibri" pitchFamily="34" charset="-122"/>
+                <a:cs typeface="Calibri" pitchFamily="34" charset="-120"/>
+              </a:rPr>
+              <a:t>UNDERSTAND NOW</a:t>
+            </a:r>
+            <a:pPr indent="0" marL="0">
+              <a:buNone/>
+            </a:pPr>
+            <a:r>
+              <a:rPr lang="en-US" sz="1100" dirty="0">
+                <a:solidFill>
+                  <a:srgbClr val="075985"/>
+                </a:solidFill>
+                <a:latin typeface="Calibri" pitchFamily="34" charset="0"/>
+                <a:ea typeface="Calibri" pitchFamily="34" charset="-122"/>
+                <a:cs typeface="Calibri" pitchFamily="34" charset="-120"/>
+              </a:rPr>
+              <a:t> · the stack</a:t>
+            </a:r>
+            <a:endParaRPr lang="en-US" sz="1100" dirty="0"/>
+          </a:p>
+        </p:txBody>
+      </p:sp>
+      <p:sp>
+        <p:nvSpPr>
           <p:cNvPr id="25" name="Slide Number Placeholder 0"/>
           <p:cNvSpPr>
             <a:spLocks noGrp="1"/>
@@ -6536,6 +7539,133 @@
       </p:sp>
       <p:sp>
         <p:nvSpPr>
+          <p:cNvPr id="19" name="Shape 17"/>
+          <p:cNvSpPr/>
+          <p:nvPr/>
+        </p:nvSpPr>
+        <p:spPr>
+          <a:xfrm>
+            <a:off x="7762443" y="91440"/>
+            <a:ext cx="3880612" cy="274320"/>
+          </a:xfrm>
+          <a:prstGeom prst="rect">
+            <a:avLst/>
+          </a:prstGeom>
+          <a:solidFill>
+            <a:srgbClr val="E0F2FE"/>
+          </a:solidFill>
+          <a:ln w="12700">
+            <a:solidFill>
+              <a:srgbClr val="0369A1"/>
+            </a:solidFill>
+            <a:prstDash val="solid"/>
+          </a:ln>
+        </p:spPr>
+      </p:sp>
+      <p:sp>
+        <p:nvSpPr>
+          <p:cNvPr id="20" name="Shape 18"/>
+          <p:cNvSpPr/>
+          <p:nvPr/>
+        </p:nvSpPr>
+        <p:spPr>
+          <a:xfrm>
+            <a:off x="7762443" y="91440"/>
+            <a:ext cx="73152" cy="274320"/>
+          </a:xfrm>
+          <a:prstGeom prst="rect">
+            <a:avLst/>
+          </a:prstGeom>
+          <a:solidFill>
+            <a:srgbClr val="0369A1"/>
+          </a:solidFill>
+          <a:ln w="12700">
+            <a:solidFill>
+              <a:srgbClr val="0369A1"/>
+            </a:solidFill>
+            <a:prstDash val="solid"/>
+          </a:ln>
+        </p:spPr>
+      </p:sp>
+      <p:pic>
+        <p:nvPicPr>
+          <p:cNvPr id="21" name="Image 0" descr="preencoded.png">    </p:cNvPr>
+          <p:cNvPicPr>
+            <a:picLocks noChangeAspect="1"/>
+          </p:cNvPicPr>
+          <p:nvPr/>
+        </p:nvPicPr>
+        <p:blipFill>
+          <a:blip r:embed="rId1"/>
+          <a:stretch>
+            <a:fillRect/>
+          </a:stretch>
+        </p:blipFill>
+        <p:spPr>
+          <a:xfrm>
+            <a:off x="7890459" y="128016"/>
+            <a:ext cx="201168" cy="201168"/>
+          </a:xfrm>
+          <a:prstGeom prst="rect">
+            <a:avLst/>
+          </a:prstGeom>
+        </p:spPr>
+      </p:pic>
+      <p:sp>
+        <p:nvSpPr>
+          <p:cNvPr id="22" name="Text 19"/>
+          <p:cNvSpPr txBox="1"/>
+          <p:nvPr/>
+        </p:nvSpPr>
+        <p:spPr>
+          <a:xfrm>
+            <a:off x="8146491" y="91440"/>
+            <a:ext cx="3459988" cy="274320"/>
+          </a:xfrm>
+          <a:prstGeom prst="rect">
+            <a:avLst/>
+          </a:prstGeom>
+          <a:noFill/>
+          <a:ln/>
+        </p:spPr>
+        <p:txBody>
+          <a:bodyPr wrap="square" lIns="0" tIns="0" rIns="0" bIns="0" rtlCol="0" anchor="ctr"/>
+          <a:lstStyle/>
+          <a:p>
+            <a:pPr indent="0" marL="0">
+              <a:buNone/>
+            </a:pPr>
+            <a:r>
+              <a:rPr lang="en-US" sz="1100" b="1" dirty="0">
+                <a:solidFill>
+                  <a:srgbClr val="075985"/>
+                </a:solidFill>
+                <a:latin typeface="Calibri" pitchFamily="34" charset="0"/>
+                <a:ea typeface="Calibri" pitchFamily="34" charset="-122"/>
+                <a:cs typeface="Calibri" pitchFamily="34" charset="-120"/>
+              </a:rPr>
+              <a:t>UNDERSTAND NOW</a:t>
+            </a:r>
+            <a:pPr indent="0" marL="0">
+              <a:buNone/>
+            </a:pPr>
+            <a:r>
+              <a:rPr lang="en-US" sz="1100" dirty="0">
+                <a:solidFill>
+                  <a:srgbClr val="075985"/>
+                </a:solidFill>
+                <a:latin typeface="Calibri" pitchFamily="34" charset="0"/>
+                <a:ea typeface="Calibri" pitchFamily="34" charset="-122"/>
+                <a:cs typeface="Calibri" pitchFamily="34" charset="-120"/>
+              </a:rPr>
+              <a:t> · accumulator, stack, registers</a:t>
+            </a:r>
+            <a:endParaRPr lang="en-US" sz="1100" dirty="0"/>
+          </a:p>
+        </p:txBody>
+      </p:sp>
+      <p:sp>
+        <p:nvSpPr>
           <p:cNvPr id="25" name="Slide Number Placeholder 0"/>
           <p:cNvSpPr>
             <a:spLocks noGrp="1"/>
@@ -7090,6 +8220,133 @@
       </p:sp>
       <p:sp>
         <p:nvSpPr>
+          <p:cNvPr id="16" name="Shape 14"/>
+          <p:cNvSpPr/>
+          <p:nvPr/>
+        </p:nvSpPr>
+        <p:spPr>
+          <a:xfrm>
+            <a:off x="7762443" y="91440"/>
+            <a:ext cx="3880612" cy="274320"/>
+          </a:xfrm>
+          <a:prstGeom prst="rect">
+            <a:avLst/>
+          </a:prstGeom>
+          <a:solidFill>
+            <a:srgbClr val="E0F2FE"/>
+          </a:solidFill>
+          <a:ln w="12700">
+            <a:solidFill>
+              <a:srgbClr val="0369A1"/>
+            </a:solidFill>
+            <a:prstDash val="solid"/>
+          </a:ln>
+        </p:spPr>
+      </p:sp>
+      <p:sp>
+        <p:nvSpPr>
+          <p:cNvPr id="17" name="Shape 15"/>
+          <p:cNvSpPr/>
+          <p:nvPr/>
+        </p:nvSpPr>
+        <p:spPr>
+          <a:xfrm>
+            <a:off x="7762443" y="91440"/>
+            <a:ext cx="73152" cy="274320"/>
+          </a:xfrm>
+          <a:prstGeom prst="rect">
+            <a:avLst/>
+          </a:prstGeom>
+          <a:solidFill>
+            <a:srgbClr val="0369A1"/>
+          </a:solidFill>
+          <a:ln w="12700">
+            <a:solidFill>
+              <a:srgbClr val="0369A1"/>
+            </a:solidFill>
+            <a:prstDash val="solid"/>
+          </a:ln>
+        </p:spPr>
+      </p:sp>
+      <p:pic>
+        <p:nvPicPr>
+          <p:cNvPr id="18" name="Image 0" descr="preencoded.png">    </p:cNvPr>
+          <p:cNvPicPr>
+            <a:picLocks noChangeAspect="1"/>
+          </p:cNvPicPr>
+          <p:nvPr/>
+        </p:nvPicPr>
+        <p:blipFill>
+          <a:blip r:embed="rId1"/>
+          <a:stretch>
+            <a:fillRect/>
+          </a:stretch>
+        </p:blipFill>
+        <p:spPr>
+          <a:xfrm>
+            <a:off x="7890459" y="128016"/>
+            <a:ext cx="201168" cy="201168"/>
+          </a:xfrm>
+          <a:prstGeom prst="rect">
+            <a:avLst/>
+          </a:prstGeom>
+        </p:spPr>
+      </p:pic>
+      <p:sp>
+        <p:nvSpPr>
+          <p:cNvPr id="19" name="Text 16"/>
+          <p:cNvSpPr txBox="1"/>
+          <p:nvPr/>
+        </p:nvSpPr>
+        <p:spPr>
+          <a:xfrm>
+            <a:off x="8146491" y="91440"/>
+            <a:ext cx="3459988" cy="274320"/>
+          </a:xfrm>
+          <a:prstGeom prst="rect">
+            <a:avLst/>
+          </a:prstGeom>
+          <a:noFill/>
+          <a:ln/>
+        </p:spPr>
+        <p:txBody>
+          <a:bodyPr wrap="square" lIns="0" tIns="0" rIns="0" bIns="0" rtlCol="0" anchor="ctr"/>
+          <a:lstStyle/>
+          <a:p>
+            <a:pPr indent="0" marL="0">
+              <a:buNone/>
+            </a:pPr>
+            <a:r>
+              <a:rPr lang="en-US" sz="1100" b="1" dirty="0">
+                <a:solidFill>
+                  <a:srgbClr val="075985"/>
+                </a:solidFill>
+                <a:latin typeface="Calibri" pitchFamily="34" charset="0"/>
+                <a:ea typeface="Calibri" pitchFamily="34" charset="-122"/>
+                <a:cs typeface="Calibri" pitchFamily="34" charset="-120"/>
+              </a:rPr>
+              <a:t>UNDERSTAND NOW</a:t>
+            </a:r>
+            <a:pPr indent="0" marL="0">
+              <a:buNone/>
+            </a:pPr>
+            <a:r>
+              <a:rPr lang="en-US" sz="1100" dirty="0">
+                <a:solidFill>
+                  <a:srgbClr val="075985"/>
+                </a:solidFill>
+                <a:latin typeface="Calibri" pitchFamily="34" charset="0"/>
+                <a:ea typeface="Calibri" pitchFamily="34" charset="-122"/>
+                <a:cs typeface="Calibri" pitchFamily="34" charset="-120"/>
+              </a:rPr>
+              <a:t> · accumulator, stack, registers</a:t>
+            </a:r>
+            <a:endParaRPr lang="en-US" sz="1100" dirty="0"/>
+          </a:p>
+        </p:txBody>
+      </p:sp>
+      <p:sp>
+        <p:nvSpPr>
           <p:cNvPr id="25" name="Slide Number Placeholder 0"/>
           <p:cNvSpPr>
             <a:spLocks noGrp="1"/>
@@ -8079,6 +9336,133 @@
               <a:t>Next to them, out of the main path: the bank of control and status registers, and the trap logic of Lecture 19. Compared with the MC68000 of the original deck there are no separate data and address registers, no condition code register and no effective-address register.</a:t>
             </a:r>
             <a:endParaRPr lang="en-US" sz="1450" dirty="0"/>
+          </a:p>
+        </p:txBody>
+      </p:sp>
+      <p:sp>
+        <p:nvSpPr>
+          <p:cNvPr id="23" name="Shape 21"/>
+          <p:cNvSpPr/>
+          <p:nvPr/>
+        </p:nvSpPr>
+        <p:spPr>
+          <a:xfrm>
+            <a:off x="8484692" y="91440"/>
+            <a:ext cx="3158363" cy="274320"/>
+          </a:xfrm>
+          <a:prstGeom prst="rect">
+            <a:avLst/>
+          </a:prstGeom>
+          <a:solidFill>
+            <a:srgbClr val="E0F2FE"/>
+          </a:solidFill>
+          <a:ln w="12700">
+            <a:solidFill>
+              <a:srgbClr val="0369A1"/>
+            </a:solidFill>
+            <a:prstDash val="solid"/>
+          </a:ln>
+        </p:spPr>
+      </p:sp>
+      <p:sp>
+        <p:nvSpPr>
+          <p:cNvPr id="24" name="Shape 22"/>
+          <p:cNvSpPr/>
+          <p:nvPr/>
+        </p:nvSpPr>
+        <p:spPr>
+          <a:xfrm>
+            <a:off x="8484692" y="91440"/>
+            <a:ext cx="73152" cy="274320"/>
+          </a:xfrm>
+          <a:prstGeom prst="rect">
+            <a:avLst/>
+          </a:prstGeom>
+          <a:solidFill>
+            <a:srgbClr val="0369A1"/>
+          </a:solidFill>
+          <a:ln w="12700">
+            <a:solidFill>
+              <a:srgbClr val="0369A1"/>
+            </a:solidFill>
+            <a:prstDash val="solid"/>
+          </a:ln>
+        </p:spPr>
+      </p:sp>
+      <p:pic>
+        <p:nvPicPr>
+          <p:cNvPr id="25" name="Image 0" descr="preencoded.png">    </p:cNvPr>
+          <p:cNvPicPr>
+            <a:picLocks noChangeAspect="1"/>
+          </p:cNvPicPr>
+          <p:nvPr/>
+        </p:nvPicPr>
+        <p:blipFill>
+          <a:blip r:embed="rId1"/>
+          <a:stretch>
+            <a:fillRect/>
+          </a:stretch>
+        </p:blipFill>
+        <p:spPr>
+          <a:xfrm>
+            <a:off x="8612708" y="128016"/>
+            <a:ext cx="201168" cy="201168"/>
+          </a:xfrm>
+          <a:prstGeom prst="rect">
+            <a:avLst/>
+          </a:prstGeom>
+        </p:spPr>
+      </p:pic>
+      <p:sp>
+        <p:nvSpPr>
+          <p:cNvPr id="26" name="Text 23"/>
+          <p:cNvSpPr txBox="1"/>
+          <p:nvPr/>
+        </p:nvSpPr>
+        <p:spPr>
+          <a:xfrm>
+            <a:off x="8868740" y="91440"/>
+            <a:ext cx="2737739" cy="274320"/>
+          </a:xfrm>
+          <a:prstGeom prst="rect">
+            <a:avLst/>
+          </a:prstGeom>
+          <a:noFill/>
+          <a:ln/>
+        </p:spPr>
+        <p:txBody>
+          <a:bodyPr wrap="square" lIns="0" tIns="0" rIns="0" bIns="0" rtlCol="0" anchor="ctr"/>
+          <a:lstStyle/>
+          <a:p>
+            <a:pPr indent="0" marL="0">
+              <a:buNone/>
+            </a:pPr>
+            <a:r>
+              <a:rPr lang="en-US" sz="1100" b="1" dirty="0">
+                <a:solidFill>
+                  <a:srgbClr val="075985"/>
+                </a:solidFill>
+                <a:latin typeface="Calibri" pitchFamily="34" charset="0"/>
+                <a:ea typeface="Calibri" pitchFamily="34" charset="-122"/>
+                <a:cs typeface="Calibri" pitchFamily="34" charset="-120"/>
+              </a:rPr>
+              <a:t>UNDERSTAND NOW</a:t>
+            </a:r>
+            <a:pPr indent="0" marL="0">
+              <a:buNone/>
+            </a:pPr>
+            <a:r>
+              <a:rPr lang="en-US" sz="1100" dirty="0">
+                <a:solidFill>
+                  <a:srgbClr val="075985"/>
+                </a:solidFill>
+                <a:latin typeface="Calibri" pitchFamily="34" charset="0"/>
+                <a:ea typeface="Calibri" pitchFamily="34" charset="-122"/>
+                <a:cs typeface="Calibri" pitchFamily="34" charset="-120"/>
+              </a:rPr>
+              <a:t> · the RV32 processor</a:t>
+            </a:r>
+            <a:endParaRPr lang="en-US" sz="1100" dirty="0"/>
           </a:p>
         </p:txBody>
       </p:sp>
@@ -9330,6 +10714,133 @@
           </a:graphicData>
         </a:graphic>
       </p:graphicFrame>
+      <p:sp>
+        <p:nvSpPr>
+          <p:cNvPr id="4" name="Shape 1"/>
+          <p:cNvSpPr/>
+          <p:nvPr/>
+        </p:nvSpPr>
+        <p:spPr>
+          <a:xfrm>
+            <a:off x="8484692" y="91440"/>
+            <a:ext cx="3158363" cy="274320"/>
+          </a:xfrm>
+          <a:prstGeom prst="rect">
+            <a:avLst/>
+          </a:prstGeom>
+          <a:solidFill>
+            <a:srgbClr val="E0F2FE"/>
+          </a:solidFill>
+          <a:ln w="12700">
+            <a:solidFill>
+              <a:srgbClr val="0369A1"/>
+            </a:solidFill>
+            <a:prstDash val="solid"/>
+          </a:ln>
+        </p:spPr>
+      </p:sp>
+      <p:sp>
+        <p:nvSpPr>
+          <p:cNvPr id="5" name="Shape 2"/>
+          <p:cNvSpPr/>
+          <p:nvPr/>
+        </p:nvSpPr>
+        <p:spPr>
+          <a:xfrm>
+            <a:off x="8484692" y="91440"/>
+            <a:ext cx="73152" cy="274320"/>
+          </a:xfrm>
+          <a:prstGeom prst="rect">
+            <a:avLst/>
+          </a:prstGeom>
+          <a:solidFill>
+            <a:srgbClr val="0369A1"/>
+          </a:solidFill>
+          <a:ln w="12700">
+            <a:solidFill>
+              <a:srgbClr val="0369A1"/>
+            </a:solidFill>
+            <a:prstDash val="solid"/>
+          </a:ln>
+        </p:spPr>
+      </p:sp>
+      <p:pic>
+        <p:nvPicPr>
+          <p:cNvPr id="6" name="Image 0" descr="preencoded.png">    </p:cNvPr>
+          <p:cNvPicPr>
+            <a:picLocks noChangeAspect="1"/>
+          </p:cNvPicPr>
+          <p:nvPr/>
+        </p:nvPicPr>
+        <p:blipFill>
+          <a:blip r:embed="rId1"/>
+          <a:stretch>
+            <a:fillRect/>
+          </a:stretch>
+        </p:blipFill>
+        <p:spPr>
+          <a:xfrm>
+            <a:off x="8612708" y="128016"/>
+            <a:ext cx="201168" cy="201168"/>
+          </a:xfrm>
+          <a:prstGeom prst="rect">
+            <a:avLst/>
+          </a:prstGeom>
+        </p:spPr>
+      </p:pic>
+      <p:sp>
+        <p:nvSpPr>
+          <p:cNvPr id="7" name="Text 3"/>
+          <p:cNvSpPr txBox="1"/>
+          <p:nvPr/>
+        </p:nvSpPr>
+        <p:spPr>
+          <a:xfrm>
+            <a:off x="8868740" y="91440"/>
+            <a:ext cx="2737739" cy="274320"/>
+          </a:xfrm>
+          <a:prstGeom prst="rect">
+            <a:avLst/>
+          </a:prstGeom>
+          <a:noFill/>
+          <a:ln/>
+        </p:spPr>
+        <p:txBody>
+          <a:bodyPr wrap="square" lIns="0" tIns="0" rIns="0" bIns="0" rtlCol="0" anchor="ctr"/>
+          <a:lstStyle/>
+          <a:p>
+            <a:pPr indent="0" marL="0">
+              <a:buNone/>
+            </a:pPr>
+            <a:r>
+              <a:rPr lang="en-US" sz="1100" b="1" dirty="0">
+                <a:solidFill>
+                  <a:srgbClr val="075985"/>
+                </a:solidFill>
+                <a:latin typeface="Calibri" pitchFamily="34" charset="0"/>
+                <a:ea typeface="Calibri" pitchFamily="34" charset="-122"/>
+                <a:cs typeface="Calibri" pitchFamily="34" charset="-120"/>
+              </a:rPr>
+              <a:t>UNDERSTAND NOW</a:t>
+            </a:r>
+            <a:pPr indent="0" marL="0">
+              <a:buNone/>
+            </a:pPr>
+            <a:r>
+              <a:rPr lang="en-US" sz="1100" dirty="0">
+                <a:solidFill>
+                  <a:srgbClr val="075985"/>
+                </a:solidFill>
+                <a:latin typeface="Calibri" pitchFamily="34" charset="0"/>
+                <a:ea typeface="Calibri" pitchFamily="34" charset="-122"/>
+                <a:cs typeface="Calibri" pitchFamily="34" charset="-120"/>
+              </a:rPr>
+              <a:t> · the RV32 processor</a:t>
+            </a:r>
+            <a:endParaRPr lang="en-US" sz="1100" dirty="0"/>
+          </a:p>
+        </p:txBody>
+      </p:sp>
       <p:sp>
         <p:nvSpPr>
           <p:cNvPr id="25" name="Slide Number Placeholder 0"/>
@@ -15387,6 +16898,133 @@
       </p:sp>
       <p:sp>
         <p:nvSpPr>
+          <p:cNvPr id="18" name="Shape 16"/>
+          <p:cNvSpPr/>
+          <p:nvPr/>
+        </p:nvSpPr>
+        <p:spPr>
+          <a:xfrm>
+            <a:off x="8419033" y="91440"/>
+            <a:ext cx="3224022" cy="274320"/>
+          </a:xfrm>
+          <a:prstGeom prst="rect">
+            <a:avLst/>
+          </a:prstGeom>
+          <a:solidFill>
+            <a:srgbClr val="E0F2FE"/>
+          </a:solidFill>
+          <a:ln w="12700">
+            <a:solidFill>
+              <a:srgbClr val="0369A1"/>
+            </a:solidFill>
+            <a:prstDash val="solid"/>
+          </a:ln>
+        </p:spPr>
+      </p:sp>
+      <p:sp>
+        <p:nvSpPr>
+          <p:cNvPr id="19" name="Shape 17"/>
+          <p:cNvSpPr/>
+          <p:nvPr/>
+        </p:nvSpPr>
+        <p:spPr>
+          <a:xfrm>
+            <a:off x="8419033" y="91440"/>
+            <a:ext cx="73152" cy="274320"/>
+          </a:xfrm>
+          <a:prstGeom prst="rect">
+            <a:avLst/>
+          </a:prstGeom>
+          <a:solidFill>
+            <a:srgbClr val="0369A1"/>
+          </a:solidFill>
+          <a:ln w="12700">
+            <a:solidFill>
+              <a:srgbClr val="0369A1"/>
+            </a:solidFill>
+            <a:prstDash val="solid"/>
+          </a:ln>
+        </p:spPr>
+      </p:sp>
+      <p:pic>
+        <p:nvPicPr>
+          <p:cNvPr id="20" name="Image 0" descr="preencoded.png">    </p:cNvPr>
+          <p:cNvPicPr>
+            <a:picLocks noChangeAspect="1"/>
+          </p:cNvPicPr>
+          <p:nvPr/>
+        </p:nvPicPr>
+        <p:blipFill>
+          <a:blip r:embed="rId1"/>
+          <a:stretch>
+            <a:fillRect/>
+          </a:stretch>
+        </p:blipFill>
+        <p:spPr>
+          <a:xfrm>
+            <a:off x="8547049" y="128016"/>
+            <a:ext cx="201168" cy="201168"/>
+          </a:xfrm>
+          <a:prstGeom prst="rect">
+            <a:avLst/>
+          </a:prstGeom>
+        </p:spPr>
+      </p:pic>
+      <p:sp>
+        <p:nvSpPr>
+          <p:cNvPr id="21" name="Text 18"/>
+          <p:cNvSpPr txBox="1"/>
+          <p:nvPr/>
+        </p:nvSpPr>
+        <p:spPr>
+          <a:xfrm>
+            <a:off x="8803081" y="91440"/>
+            <a:ext cx="2803398" cy="274320"/>
+          </a:xfrm>
+          <a:prstGeom prst="rect">
+            <a:avLst/>
+          </a:prstGeom>
+          <a:noFill/>
+          <a:ln/>
+        </p:spPr>
+        <p:txBody>
+          <a:bodyPr wrap="square" lIns="0" tIns="0" rIns="0" bIns="0" rtlCol="0" anchor="ctr"/>
+          <a:lstStyle/>
+          <a:p>
+            <a:pPr indent="0" marL="0">
+              <a:buNone/>
+            </a:pPr>
+            <a:r>
+              <a:rPr lang="en-US" sz="1100" b="1" dirty="0">
+                <a:solidFill>
+                  <a:srgbClr val="075985"/>
+                </a:solidFill>
+                <a:latin typeface="Calibri" pitchFamily="34" charset="0"/>
+                <a:ea typeface="Calibri" pitchFamily="34" charset="-122"/>
+                <a:cs typeface="Calibri" pitchFamily="34" charset="-120"/>
+              </a:rPr>
+              <a:t>UNDERSTAND NOW</a:t>
+            </a:r>
+            <a:pPr indent="0" marL="0">
+              <a:buNone/>
+            </a:pPr>
+            <a:r>
+              <a:rPr lang="en-US" sz="1100" dirty="0">
+                <a:solidFill>
+                  <a:srgbClr val="075985"/>
+                </a:solidFill>
+                <a:latin typeface="Calibri" pitchFamily="34" charset="0"/>
+                <a:ea typeface="Calibri" pitchFamily="34" charset="-122"/>
+                <a:cs typeface="Calibri" pitchFamily="34" charset="-120"/>
+              </a:rPr>
+              <a:t> · the processor model</a:t>
+            </a:r>
+            <a:endParaRPr lang="en-US" sz="1100" dirty="0"/>
+          </a:p>
+        </p:txBody>
+      </p:sp>
+      <p:sp>
+        <p:nvSpPr>
           <p:cNvPr id="25" name="Slide Number Placeholder 0"/>
           <p:cNvSpPr>
             <a:spLocks noGrp="1"/>
@@ -16879,6 +18517,133 @@
               <a:t>– I/O buffer registers RI and RU</a:t>
             </a:r>
             <a:endParaRPr lang="en-US" sz="1800" dirty="0"/>
+          </a:p>
+        </p:txBody>
+      </p:sp>
+      <p:sp>
+        <p:nvSpPr>
+          <p:cNvPr id="34" name="Shape 32"/>
+          <p:cNvSpPr/>
+          <p:nvPr/>
+        </p:nvSpPr>
+        <p:spPr>
+          <a:xfrm>
+            <a:off x="8419033" y="91440"/>
+            <a:ext cx="3224022" cy="274320"/>
+          </a:xfrm>
+          <a:prstGeom prst="rect">
+            <a:avLst/>
+          </a:prstGeom>
+          <a:solidFill>
+            <a:srgbClr val="E0F2FE"/>
+          </a:solidFill>
+          <a:ln w="12700">
+            <a:solidFill>
+              <a:srgbClr val="0369A1"/>
+            </a:solidFill>
+            <a:prstDash val="solid"/>
+          </a:ln>
+        </p:spPr>
+      </p:sp>
+      <p:sp>
+        <p:nvSpPr>
+          <p:cNvPr id="35" name="Shape 33"/>
+          <p:cNvSpPr/>
+          <p:nvPr/>
+        </p:nvSpPr>
+        <p:spPr>
+          <a:xfrm>
+            <a:off x="8419033" y="91440"/>
+            <a:ext cx="73152" cy="274320"/>
+          </a:xfrm>
+          <a:prstGeom prst="rect">
+            <a:avLst/>
+          </a:prstGeom>
+          <a:solidFill>
+            <a:srgbClr val="0369A1"/>
+          </a:solidFill>
+          <a:ln w="12700">
+            <a:solidFill>
+              <a:srgbClr val="0369A1"/>
+            </a:solidFill>
+            <a:prstDash val="solid"/>
+          </a:ln>
+        </p:spPr>
+      </p:sp>
+      <p:pic>
+        <p:nvPicPr>
+          <p:cNvPr id="36" name="Image 0" descr="preencoded.png">    </p:cNvPr>
+          <p:cNvPicPr>
+            <a:picLocks noChangeAspect="1"/>
+          </p:cNvPicPr>
+          <p:nvPr/>
+        </p:nvPicPr>
+        <p:blipFill>
+          <a:blip r:embed="rId1"/>
+          <a:stretch>
+            <a:fillRect/>
+          </a:stretch>
+        </p:blipFill>
+        <p:spPr>
+          <a:xfrm>
+            <a:off x="8547049" y="128016"/>
+            <a:ext cx="201168" cy="201168"/>
+          </a:xfrm>
+          <a:prstGeom prst="rect">
+            <a:avLst/>
+          </a:prstGeom>
+        </p:spPr>
+      </p:pic>
+      <p:sp>
+        <p:nvSpPr>
+          <p:cNvPr id="37" name="Text 34"/>
+          <p:cNvSpPr txBox="1"/>
+          <p:nvPr/>
+        </p:nvSpPr>
+        <p:spPr>
+          <a:xfrm>
+            <a:off x="8803081" y="91440"/>
+            <a:ext cx="2803398" cy="274320"/>
+          </a:xfrm>
+          <a:prstGeom prst="rect">
+            <a:avLst/>
+          </a:prstGeom>
+          <a:noFill/>
+          <a:ln/>
+        </p:spPr>
+        <p:txBody>
+          <a:bodyPr wrap="square" lIns="0" tIns="0" rIns="0" bIns="0" rtlCol="0" anchor="ctr"/>
+          <a:lstStyle/>
+          <a:p>
+            <a:pPr indent="0" marL="0">
+              <a:buNone/>
+            </a:pPr>
+            <a:r>
+              <a:rPr lang="en-US" sz="1100" b="1" dirty="0">
+                <a:solidFill>
+                  <a:srgbClr val="075985"/>
+                </a:solidFill>
+                <a:latin typeface="Calibri" pitchFamily="34" charset="0"/>
+                <a:ea typeface="Calibri" pitchFamily="34" charset="-122"/>
+                <a:cs typeface="Calibri" pitchFamily="34" charset="-120"/>
+              </a:rPr>
+              <a:t>UNDERSTAND NOW</a:t>
+            </a:r>
+            <a:pPr indent="0" marL="0">
+              <a:buNone/>
+            </a:pPr>
+            <a:r>
+              <a:rPr lang="en-US" sz="1100" dirty="0">
+                <a:solidFill>
+                  <a:srgbClr val="075985"/>
+                </a:solidFill>
+                <a:latin typeface="Calibri" pitchFamily="34" charset="0"/>
+                <a:ea typeface="Calibri" pitchFamily="34" charset="-122"/>
+                <a:cs typeface="Calibri" pitchFamily="34" charset="-120"/>
+              </a:rPr>
+              <a:t> · the processor model</a:t>
+            </a:r>
+            <a:endParaRPr lang="en-US" sz="1100" dirty="0"/>
           </a:p>
         </p:txBody>
       </p:sp>
@@ -18883,6 +20648,133 @@
       </p:graphicFrame>
       <p:sp>
         <p:nvSpPr>
+          <p:cNvPr id="4" name="Shape 1"/>
+          <p:cNvSpPr/>
+          <p:nvPr/>
+        </p:nvSpPr>
+        <p:spPr>
+          <a:xfrm>
+            <a:off x="8419033" y="91440"/>
+            <a:ext cx="3224022" cy="274320"/>
+          </a:xfrm>
+          <a:prstGeom prst="rect">
+            <a:avLst/>
+          </a:prstGeom>
+          <a:solidFill>
+            <a:srgbClr val="E0F2FE"/>
+          </a:solidFill>
+          <a:ln w="12700">
+            <a:solidFill>
+              <a:srgbClr val="0369A1"/>
+            </a:solidFill>
+            <a:prstDash val="solid"/>
+          </a:ln>
+        </p:spPr>
+      </p:sp>
+      <p:sp>
+        <p:nvSpPr>
+          <p:cNvPr id="5" name="Shape 2"/>
+          <p:cNvSpPr/>
+          <p:nvPr/>
+        </p:nvSpPr>
+        <p:spPr>
+          <a:xfrm>
+            <a:off x="8419033" y="91440"/>
+            <a:ext cx="73152" cy="274320"/>
+          </a:xfrm>
+          <a:prstGeom prst="rect">
+            <a:avLst/>
+          </a:prstGeom>
+          <a:solidFill>
+            <a:srgbClr val="0369A1"/>
+          </a:solidFill>
+          <a:ln w="12700">
+            <a:solidFill>
+              <a:srgbClr val="0369A1"/>
+            </a:solidFill>
+            <a:prstDash val="solid"/>
+          </a:ln>
+        </p:spPr>
+      </p:sp>
+      <p:pic>
+        <p:nvPicPr>
+          <p:cNvPr id="6" name="Image 0" descr="preencoded.png">    </p:cNvPr>
+          <p:cNvPicPr>
+            <a:picLocks noChangeAspect="1"/>
+          </p:cNvPicPr>
+          <p:nvPr/>
+        </p:nvPicPr>
+        <p:blipFill>
+          <a:blip r:embed="rId1"/>
+          <a:stretch>
+            <a:fillRect/>
+          </a:stretch>
+        </p:blipFill>
+        <p:spPr>
+          <a:xfrm>
+            <a:off x="8547049" y="128016"/>
+            <a:ext cx="201168" cy="201168"/>
+          </a:xfrm>
+          <a:prstGeom prst="rect">
+            <a:avLst/>
+          </a:prstGeom>
+        </p:spPr>
+      </p:pic>
+      <p:sp>
+        <p:nvSpPr>
+          <p:cNvPr id="7" name="Text 3"/>
+          <p:cNvSpPr txBox="1"/>
+          <p:nvPr/>
+        </p:nvSpPr>
+        <p:spPr>
+          <a:xfrm>
+            <a:off x="8803081" y="91440"/>
+            <a:ext cx="2803398" cy="274320"/>
+          </a:xfrm>
+          <a:prstGeom prst="rect">
+            <a:avLst/>
+          </a:prstGeom>
+          <a:noFill/>
+          <a:ln/>
+        </p:spPr>
+        <p:txBody>
+          <a:bodyPr wrap="square" lIns="0" tIns="0" rIns="0" bIns="0" rtlCol="0" anchor="ctr"/>
+          <a:lstStyle/>
+          <a:p>
+            <a:pPr indent="0" marL="0">
+              <a:buNone/>
+            </a:pPr>
+            <a:r>
+              <a:rPr lang="en-US" sz="1100" b="1" dirty="0">
+                <a:solidFill>
+                  <a:srgbClr val="075985"/>
+                </a:solidFill>
+                <a:latin typeface="Calibri" pitchFamily="34" charset="0"/>
+                <a:ea typeface="Calibri" pitchFamily="34" charset="-122"/>
+                <a:cs typeface="Calibri" pitchFamily="34" charset="-120"/>
+              </a:rPr>
+              <a:t>UNDERSTAND NOW</a:t>
+            </a:r>
+            <a:pPr indent="0" marL="0">
+              <a:buNone/>
+            </a:pPr>
+            <a:r>
+              <a:rPr lang="en-US" sz="1100" dirty="0">
+                <a:solidFill>
+                  <a:srgbClr val="075985"/>
+                </a:solidFill>
+                <a:latin typeface="Calibri" pitchFamily="34" charset="0"/>
+                <a:ea typeface="Calibri" pitchFamily="34" charset="-122"/>
+                <a:cs typeface="Calibri" pitchFamily="34" charset="-120"/>
+              </a:rPr>
+              <a:t> · the processor model</a:t>
+            </a:r>
+            <a:endParaRPr lang="en-US" sz="1100" dirty="0"/>
+          </a:p>
+        </p:txBody>
+      </p:sp>
+      <p:sp>
+        <p:nvSpPr>
           <p:cNvPr id="25" name="Slide Number Placeholder 0"/>
           <p:cNvSpPr>
             <a:spLocks noGrp="1"/>
@@ -19445,6 +21337,133 @@
               <a:t>registers of 32 bits, addresses of 32 bits, instructions of 32 bits</a:t>
             </a:r>
             <a:endParaRPr lang="en-US" sz="1900" dirty="0"/>
+          </a:p>
+        </p:txBody>
+      </p:sp>
+      <p:sp>
+        <p:nvSpPr>
+          <p:cNvPr id="14" name="Shape 12"/>
+          <p:cNvSpPr/>
+          <p:nvPr/>
+        </p:nvSpPr>
+        <p:spPr>
+          <a:xfrm>
+            <a:off x="8419033" y="91440"/>
+            <a:ext cx="3224022" cy="274320"/>
+          </a:xfrm>
+          <a:prstGeom prst="rect">
+            <a:avLst/>
+          </a:prstGeom>
+          <a:solidFill>
+            <a:srgbClr val="E0F2FE"/>
+          </a:solidFill>
+          <a:ln w="12700">
+            <a:solidFill>
+              <a:srgbClr val="0369A1"/>
+            </a:solidFill>
+            <a:prstDash val="solid"/>
+          </a:ln>
+        </p:spPr>
+      </p:sp>
+      <p:sp>
+        <p:nvSpPr>
+          <p:cNvPr id="15" name="Shape 13"/>
+          <p:cNvSpPr/>
+          <p:nvPr/>
+        </p:nvSpPr>
+        <p:spPr>
+          <a:xfrm>
+            <a:off x="8419033" y="91440"/>
+            <a:ext cx="73152" cy="274320"/>
+          </a:xfrm>
+          <a:prstGeom prst="rect">
+            <a:avLst/>
+          </a:prstGeom>
+          <a:solidFill>
+            <a:srgbClr val="0369A1"/>
+          </a:solidFill>
+          <a:ln w="12700">
+            <a:solidFill>
+              <a:srgbClr val="0369A1"/>
+            </a:solidFill>
+            <a:prstDash val="solid"/>
+          </a:ln>
+        </p:spPr>
+      </p:sp>
+      <p:pic>
+        <p:nvPicPr>
+          <p:cNvPr id="16" name="Image 0" descr="preencoded.png">    </p:cNvPr>
+          <p:cNvPicPr>
+            <a:picLocks noChangeAspect="1"/>
+          </p:cNvPicPr>
+          <p:nvPr/>
+        </p:nvPicPr>
+        <p:blipFill>
+          <a:blip r:embed="rId1"/>
+          <a:stretch>
+            <a:fillRect/>
+          </a:stretch>
+        </p:blipFill>
+        <p:spPr>
+          <a:xfrm>
+            <a:off x="8547049" y="128016"/>
+            <a:ext cx="201168" cy="201168"/>
+          </a:xfrm>
+          <a:prstGeom prst="rect">
+            <a:avLst/>
+          </a:prstGeom>
+        </p:spPr>
+      </p:pic>
+      <p:sp>
+        <p:nvSpPr>
+          <p:cNvPr id="17" name="Text 14"/>
+          <p:cNvSpPr txBox="1"/>
+          <p:nvPr/>
+        </p:nvSpPr>
+        <p:spPr>
+          <a:xfrm>
+            <a:off x="8803081" y="91440"/>
+            <a:ext cx="2803398" cy="274320"/>
+          </a:xfrm>
+          <a:prstGeom prst="rect">
+            <a:avLst/>
+          </a:prstGeom>
+          <a:noFill/>
+          <a:ln/>
+        </p:spPr>
+        <p:txBody>
+          <a:bodyPr wrap="square" lIns="0" tIns="0" rIns="0" bIns="0" rtlCol="0" anchor="ctr"/>
+          <a:lstStyle/>
+          <a:p>
+            <a:pPr indent="0" marL="0">
+              <a:buNone/>
+            </a:pPr>
+            <a:r>
+              <a:rPr lang="en-US" sz="1100" b="1" dirty="0">
+                <a:solidFill>
+                  <a:srgbClr val="075985"/>
+                </a:solidFill>
+                <a:latin typeface="Calibri" pitchFamily="34" charset="0"/>
+                <a:ea typeface="Calibri" pitchFamily="34" charset="-122"/>
+                <a:cs typeface="Calibri" pitchFamily="34" charset="-120"/>
+              </a:rPr>
+              <a:t>UNDERSTAND NOW</a:t>
+            </a:r>
+            <a:pPr indent="0" marL="0">
+              <a:buNone/>
+            </a:pPr>
+            <a:r>
+              <a:rPr lang="en-US" sz="1100" dirty="0">
+                <a:solidFill>
+                  <a:srgbClr val="075985"/>
+                </a:solidFill>
+                <a:latin typeface="Calibri" pitchFamily="34" charset="0"/>
+                <a:ea typeface="Calibri" pitchFamily="34" charset="-122"/>
+                <a:cs typeface="Calibri" pitchFamily="34" charset="-120"/>
+              </a:rPr>
+              <a:t> · the processor model</a:t>
+            </a:r>
+            <a:endParaRPr lang="en-US" sz="1100" dirty="0"/>
           </a:p>
         </p:txBody>
       </p:sp>
@@ -20457,6 +22476,324 @@
       </p:sp>
       <p:sp>
         <p:nvSpPr>
+          <p:cNvPr id="5" name="Shape 2"/>
+          <p:cNvSpPr/>
+          <p:nvPr/>
+        </p:nvSpPr>
+        <p:spPr>
+          <a:xfrm>
+            <a:off x="7217613" y="91440"/>
+            <a:ext cx="4425442" cy="274320"/>
+          </a:xfrm>
+          <a:prstGeom prst="rect">
+            <a:avLst/>
+          </a:prstGeom>
+          <a:solidFill>
+            <a:srgbClr val="F3E8FF"/>
+          </a:solidFill>
+          <a:ln w="12700">
+            <a:solidFill>
+              <a:srgbClr val="7E22CE"/>
+            </a:solidFill>
+            <a:prstDash val="dash"/>
+          </a:ln>
+        </p:spPr>
+      </p:sp>
+      <p:sp>
+        <p:nvSpPr>
+          <p:cNvPr id="6" name="Shape 3"/>
+          <p:cNvSpPr/>
+          <p:nvPr/>
+        </p:nvSpPr>
+        <p:spPr>
+          <a:xfrm>
+            <a:off x="7245045" y="128016"/>
+            <a:ext cx="45720" cy="45720"/>
+          </a:xfrm>
+          <a:prstGeom prst="rect">
+            <a:avLst/>
+          </a:prstGeom>
+          <a:solidFill>
+            <a:srgbClr val="7E22CE"/>
+          </a:solidFill>
+          <a:ln w="12700">
+            <a:solidFill>
+              <a:srgbClr val="7E22CE"/>
+            </a:solidFill>
+            <a:prstDash val="solid"/>
+          </a:ln>
+        </p:spPr>
+      </p:sp>
+      <p:sp>
+        <p:nvSpPr>
+          <p:cNvPr id="7" name="Shape 4"/>
+          <p:cNvSpPr/>
+          <p:nvPr/>
+        </p:nvSpPr>
+        <p:spPr>
+          <a:xfrm>
+            <a:off x="7245045" y="205740"/>
+            <a:ext cx="45720" cy="45720"/>
+          </a:xfrm>
+          <a:prstGeom prst="rect">
+            <a:avLst/>
+          </a:prstGeom>
+          <a:solidFill>
+            <a:srgbClr val="7E22CE"/>
+          </a:solidFill>
+          <a:ln w="12700">
+            <a:solidFill>
+              <a:srgbClr val="7E22CE"/>
+            </a:solidFill>
+            <a:prstDash val="solid"/>
+          </a:ln>
+        </p:spPr>
+      </p:sp>
+      <p:sp>
+        <p:nvSpPr>
+          <p:cNvPr id="8" name="Shape 5"/>
+          <p:cNvSpPr/>
+          <p:nvPr/>
+        </p:nvSpPr>
+        <p:spPr>
+          <a:xfrm>
+            <a:off x="7245045" y="283464"/>
+            <a:ext cx="45720" cy="45720"/>
+          </a:xfrm>
+          <a:prstGeom prst="rect">
+            <a:avLst/>
+          </a:prstGeom>
+          <a:solidFill>
+            <a:srgbClr val="7E22CE"/>
+          </a:solidFill>
+          <a:ln w="12700">
+            <a:solidFill>
+              <a:srgbClr val="7E22CE"/>
+            </a:solidFill>
+            <a:prstDash val="solid"/>
+          </a:ln>
+        </p:spPr>
+      </p:sp>
+      <p:pic>
+        <p:nvPicPr>
+          <p:cNvPr id="9" name="Image 0" descr="preencoded.png">    </p:cNvPr>
+          <p:cNvPicPr>
+            <a:picLocks noChangeAspect="1"/>
+          </p:cNvPicPr>
+          <p:nvPr/>
+        </p:nvPicPr>
+        <p:blipFill>
+          <a:blip r:embed="rId1"/>
+          <a:stretch>
+            <a:fillRect/>
+          </a:stretch>
+        </p:blipFill>
+        <p:spPr>
+          <a:xfrm>
+            <a:off x="7345629" y="128016"/>
+            <a:ext cx="201168" cy="201168"/>
+          </a:xfrm>
+          <a:prstGeom prst="rect">
+            <a:avLst/>
+          </a:prstGeom>
+        </p:spPr>
+      </p:pic>
+      <p:sp>
+        <p:nvSpPr>
+          <p:cNvPr id="10" name="Text 6"/>
+          <p:cNvSpPr txBox="1"/>
+          <p:nvPr/>
+        </p:nvSpPr>
+        <p:spPr>
+          <a:xfrm>
+            <a:off x="7601661" y="91440"/>
+            <a:ext cx="4004818" cy="274320"/>
+          </a:xfrm>
+          <a:prstGeom prst="rect">
+            <a:avLst/>
+          </a:prstGeom>
+          <a:noFill/>
+          <a:ln/>
+        </p:spPr>
+        <p:txBody>
+          <a:bodyPr wrap="square" lIns="0" tIns="0" rIns="0" bIns="0" rtlCol="0" anchor="ctr"/>
+          <a:lstStyle/>
+          <a:p>
+            <a:pPr indent="0" marL="0">
+              <a:buNone/>
+            </a:pPr>
+            <a:r>
+              <a:rPr lang="en-US" sz="1100" b="1" dirty="0">
+                <a:solidFill>
+                  <a:srgbClr val="6B21A8"/>
+                </a:solidFill>
+                <a:latin typeface="Calibri" pitchFamily="34" charset="0"/>
+                <a:ea typeface="Calibri" pitchFamily="34" charset="-122"/>
+                <a:cs typeface="Calibri" pitchFamily="34" charset="-120"/>
+              </a:rPr>
+              <a:t>UNDERSTAND LATER</a:t>
+            </a:r>
+            <a:pPr indent="0" marL="0">
+              <a:buNone/>
+            </a:pPr>
+            <a:r>
+              <a:rPr lang="en-US" sz="1100" dirty="0">
+                <a:solidFill>
+                  <a:srgbClr val="6B21A8"/>
+                </a:solidFill>
+                <a:latin typeface="Calibri" pitchFamily="34" charset="0"/>
+                <a:ea typeface="Calibri" pitchFamily="34" charset="-122"/>
+                <a:cs typeface="Calibri" pitchFamily="34" charset="-120"/>
+              </a:rPr>
+              <a:t> · interrupts and traps</a:t>
+            </a:r>
+            <a:pPr indent="0" marL="0">
+              <a:buNone/>
+            </a:pPr>
+            <a:r>
+              <a:rPr lang="en-US" sz="1100" b="1" dirty="0">
+                <a:solidFill>
+                  <a:srgbClr val="6B21A8"/>
+                </a:solidFill>
+                <a:latin typeface="Calibri" pitchFamily="34" charset="0"/>
+                <a:ea typeface="Calibri" pitchFamily="34" charset="-122"/>
+                <a:cs typeface="Calibri" pitchFamily="34" charset="-120"/>
+              </a:rPr>
+              <a:t> → Lecture 19</a:t>
+            </a:r>
+            <a:endParaRPr lang="en-US" sz="1100" dirty="0"/>
+          </a:p>
+        </p:txBody>
+      </p:sp>
+      <p:sp>
+        <p:nvSpPr>
+          <p:cNvPr id="11" name="Shape 7"/>
+          <p:cNvSpPr/>
+          <p:nvPr/>
+        </p:nvSpPr>
+        <p:spPr>
+          <a:xfrm>
+            <a:off x="3883863" y="91440"/>
+            <a:ext cx="3224022" cy="274320"/>
+          </a:xfrm>
+          <a:prstGeom prst="rect">
+            <a:avLst/>
+          </a:prstGeom>
+          <a:solidFill>
+            <a:srgbClr val="E0F2FE"/>
+          </a:solidFill>
+          <a:ln w="12700">
+            <a:solidFill>
+              <a:srgbClr val="0369A1"/>
+            </a:solidFill>
+            <a:prstDash val="solid"/>
+          </a:ln>
+        </p:spPr>
+      </p:sp>
+      <p:sp>
+        <p:nvSpPr>
+          <p:cNvPr id="12" name="Shape 8"/>
+          <p:cNvSpPr/>
+          <p:nvPr/>
+        </p:nvSpPr>
+        <p:spPr>
+          <a:xfrm>
+            <a:off x="3883863" y="91440"/>
+            <a:ext cx="73152" cy="274320"/>
+          </a:xfrm>
+          <a:prstGeom prst="rect">
+            <a:avLst/>
+          </a:prstGeom>
+          <a:solidFill>
+            <a:srgbClr val="0369A1"/>
+          </a:solidFill>
+          <a:ln w="12700">
+            <a:solidFill>
+              <a:srgbClr val="0369A1"/>
+            </a:solidFill>
+            <a:prstDash val="solid"/>
+          </a:ln>
+        </p:spPr>
+      </p:sp>
+      <p:pic>
+        <p:nvPicPr>
+          <p:cNvPr id="13" name="Image 1" descr="preencoded.png">    </p:cNvPr>
+          <p:cNvPicPr>
+            <a:picLocks noChangeAspect="1"/>
+          </p:cNvPicPr>
+          <p:nvPr/>
+        </p:nvPicPr>
+        <p:blipFill>
+          <a:blip r:embed="rId2"/>
+          <a:stretch>
+            <a:fillRect/>
+          </a:stretch>
+        </p:blipFill>
+        <p:spPr>
+          <a:xfrm>
+            <a:off x="4011879" y="128016"/>
+            <a:ext cx="201168" cy="201168"/>
+          </a:xfrm>
+          <a:prstGeom prst="rect">
+            <a:avLst/>
+          </a:prstGeom>
+        </p:spPr>
+      </p:pic>
+      <p:sp>
+        <p:nvSpPr>
+          <p:cNvPr id="14" name="Text 9"/>
+          <p:cNvSpPr txBox="1"/>
+          <p:nvPr/>
+        </p:nvSpPr>
+        <p:spPr>
+          <a:xfrm>
+            <a:off x="4267911" y="91440"/>
+            <a:ext cx="2803398" cy="274320"/>
+          </a:xfrm>
+          <a:prstGeom prst="rect">
+            <a:avLst/>
+          </a:prstGeom>
+          <a:noFill/>
+          <a:ln/>
+        </p:spPr>
+        <p:txBody>
+          <a:bodyPr wrap="square" lIns="0" tIns="0" rIns="0" bIns="0" rtlCol="0" anchor="ctr"/>
+          <a:lstStyle/>
+          <a:p>
+            <a:pPr indent="0" marL="0">
+              <a:buNone/>
+            </a:pPr>
+            <a:r>
+              <a:rPr lang="en-US" sz="1100" b="1" dirty="0">
+                <a:solidFill>
+                  <a:srgbClr val="075985"/>
+                </a:solidFill>
+                <a:latin typeface="Calibri" pitchFamily="34" charset="0"/>
+                <a:ea typeface="Calibri" pitchFamily="34" charset="-122"/>
+                <a:cs typeface="Calibri" pitchFamily="34" charset="-120"/>
+              </a:rPr>
+              <a:t>UNDERSTAND NOW</a:t>
+            </a:r>
+            <a:pPr indent="0" marL="0">
+              <a:buNone/>
+            </a:pPr>
+            <a:r>
+              <a:rPr lang="en-US" sz="1100" dirty="0">
+                <a:solidFill>
+                  <a:srgbClr val="075985"/>
+                </a:solidFill>
+                <a:latin typeface="Calibri" pitchFamily="34" charset="0"/>
+                <a:ea typeface="Calibri" pitchFamily="34" charset="-122"/>
+                <a:cs typeface="Calibri" pitchFamily="34" charset="-120"/>
+              </a:rPr>
+              <a:t> · the processor model</a:t>
+            </a:r>
+            <a:endParaRPr lang="en-US" sz="1100" dirty="0"/>
+          </a:p>
+        </p:txBody>
+      </p:sp>
+      <p:sp>
+        <p:nvSpPr>
           <p:cNvPr id="25" name="Slide Number Placeholder 0"/>
           <p:cNvSpPr>
             <a:spLocks noGrp="1"/>
@@ -21021,6 +23358,133 @@
               <a:t>– produced during the execution of an instruction, they can condition the following ones</a:t>
             </a:r>
             <a:endParaRPr lang="en-US" sz="2100" dirty="0"/>
+          </a:p>
+        </p:txBody>
+      </p:sp>
+      <p:sp>
+        <p:nvSpPr>
+          <p:cNvPr id="13" name="Shape 11"/>
+          <p:cNvSpPr/>
+          <p:nvPr/>
+        </p:nvSpPr>
+        <p:spPr>
+          <a:xfrm>
+            <a:off x="8156397" y="91440"/>
+            <a:ext cx="3486658" cy="274320"/>
+          </a:xfrm>
+          <a:prstGeom prst="rect">
+            <a:avLst/>
+          </a:prstGeom>
+          <a:solidFill>
+            <a:srgbClr val="E0F2FE"/>
+          </a:solidFill>
+          <a:ln w="12700">
+            <a:solidFill>
+              <a:srgbClr val="0369A1"/>
+            </a:solidFill>
+            <a:prstDash val="solid"/>
+          </a:ln>
+        </p:spPr>
+      </p:sp>
+      <p:sp>
+        <p:nvSpPr>
+          <p:cNvPr id="14" name="Shape 12"/>
+          <p:cNvSpPr/>
+          <p:nvPr/>
+        </p:nvSpPr>
+        <p:spPr>
+          <a:xfrm>
+            <a:off x="8156397" y="91440"/>
+            <a:ext cx="73152" cy="274320"/>
+          </a:xfrm>
+          <a:prstGeom prst="rect">
+            <a:avLst/>
+          </a:prstGeom>
+          <a:solidFill>
+            <a:srgbClr val="0369A1"/>
+          </a:solidFill>
+          <a:ln w="12700">
+            <a:solidFill>
+              <a:srgbClr val="0369A1"/>
+            </a:solidFill>
+            <a:prstDash val="solid"/>
+          </a:ln>
+        </p:spPr>
+      </p:sp>
+      <p:pic>
+        <p:nvPicPr>
+          <p:cNvPr id="15" name="Image 0" descr="preencoded.png">    </p:cNvPr>
+          <p:cNvPicPr>
+            <a:picLocks noChangeAspect="1"/>
+          </p:cNvPicPr>
+          <p:nvPr/>
+        </p:nvPicPr>
+        <p:blipFill>
+          <a:blip r:embed="rId1"/>
+          <a:stretch>
+            <a:fillRect/>
+          </a:stretch>
+        </p:blipFill>
+        <p:spPr>
+          <a:xfrm>
+            <a:off x="8284413" y="128016"/>
+            <a:ext cx="201168" cy="201168"/>
+          </a:xfrm>
+          <a:prstGeom prst="rect">
+            <a:avLst/>
+          </a:prstGeom>
+        </p:spPr>
+      </p:pic>
+      <p:sp>
+        <p:nvSpPr>
+          <p:cNvPr id="16" name="Text 13"/>
+          <p:cNvSpPr txBox="1"/>
+          <p:nvPr/>
+        </p:nvSpPr>
+        <p:spPr>
+          <a:xfrm>
+            <a:off x="8540445" y="91440"/>
+            <a:ext cx="3066034" cy="274320"/>
+          </a:xfrm>
+          <a:prstGeom prst="rect">
+            <a:avLst/>
+          </a:prstGeom>
+          <a:noFill/>
+          <a:ln/>
+        </p:spPr>
+        <p:txBody>
+          <a:bodyPr wrap="square" lIns="0" tIns="0" rIns="0" bIns="0" rtlCol="0" anchor="ctr"/>
+          <a:lstStyle/>
+          <a:p>
+            <a:pPr indent="0" marL="0">
+              <a:buNone/>
+            </a:pPr>
+            <a:r>
+              <a:rPr lang="en-US" sz="1100" b="1" dirty="0">
+                <a:solidFill>
+                  <a:srgbClr val="075985"/>
+                </a:solidFill>
+                <a:latin typeface="Calibri" pitchFamily="34" charset="0"/>
+                <a:ea typeface="Calibri" pitchFamily="34" charset="-122"/>
+                <a:cs typeface="Calibri" pitchFamily="34" charset="-120"/>
+              </a:rPr>
+              <a:t>UNDERSTAND NOW</a:t>
+            </a:r>
+            <a:pPr indent="0" marL="0">
+              <a:buNone/>
+            </a:pPr>
+            <a:r>
+              <a:rPr lang="en-US" sz="1100" dirty="0">
+                <a:solidFill>
+                  <a:srgbClr val="075985"/>
+                </a:solidFill>
+                <a:latin typeface="Calibri" pitchFamily="34" charset="0"/>
+                <a:ea typeface="Calibri" pitchFamily="34" charset="-122"/>
+                <a:cs typeface="Calibri" pitchFamily="34" charset="-120"/>
+              </a:rPr>
+              <a:t> · the registers of RISC-V</a:t>
+            </a:r>
+            <a:endParaRPr lang="en-US" sz="1100" dirty="0"/>
           </a:p>
         </p:txBody>
       </p:sp>
@@ -24042,6 +26506,133 @@
           </a:graphicData>
         </a:graphic>
       </p:graphicFrame>
+      <p:sp>
+        <p:nvSpPr>
+          <p:cNvPr id="4" name="Shape 1"/>
+          <p:cNvSpPr/>
+          <p:nvPr/>
+        </p:nvSpPr>
+        <p:spPr>
+          <a:xfrm>
+            <a:off x="8156397" y="91440"/>
+            <a:ext cx="3486658" cy="274320"/>
+          </a:xfrm>
+          <a:prstGeom prst="rect">
+            <a:avLst/>
+          </a:prstGeom>
+          <a:solidFill>
+            <a:srgbClr val="E0F2FE"/>
+          </a:solidFill>
+          <a:ln w="12700">
+            <a:solidFill>
+              <a:srgbClr val="0369A1"/>
+            </a:solidFill>
+            <a:prstDash val="solid"/>
+          </a:ln>
+        </p:spPr>
+      </p:sp>
+      <p:sp>
+        <p:nvSpPr>
+          <p:cNvPr id="5" name="Shape 2"/>
+          <p:cNvSpPr/>
+          <p:nvPr/>
+        </p:nvSpPr>
+        <p:spPr>
+          <a:xfrm>
+            <a:off x="8156397" y="91440"/>
+            <a:ext cx="73152" cy="274320"/>
+          </a:xfrm>
+          <a:prstGeom prst="rect">
+            <a:avLst/>
+          </a:prstGeom>
+          <a:solidFill>
+            <a:srgbClr val="0369A1"/>
+          </a:solidFill>
+          <a:ln w="12700">
+            <a:solidFill>
+              <a:srgbClr val="0369A1"/>
+            </a:solidFill>
+            <a:prstDash val="solid"/>
+          </a:ln>
+        </p:spPr>
+      </p:sp>
+      <p:pic>
+        <p:nvPicPr>
+          <p:cNvPr id="6" name="Image 0" descr="preencoded.png">    </p:cNvPr>
+          <p:cNvPicPr>
+            <a:picLocks noChangeAspect="1"/>
+          </p:cNvPicPr>
+          <p:nvPr/>
+        </p:nvPicPr>
+        <p:blipFill>
+          <a:blip r:embed="rId1"/>
+          <a:stretch>
+            <a:fillRect/>
+          </a:stretch>
+        </p:blipFill>
+        <p:spPr>
+          <a:xfrm>
+            <a:off x="8284413" y="128016"/>
+            <a:ext cx="201168" cy="201168"/>
+          </a:xfrm>
+          <a:prstGeom prst="rect">
+            <a:avLst/>
+          </a:prstGeom>
+        </p:spPr>
+      </p:pic>
+      <p:sp>
+        <p:nvSpPr>
+          <p:cNvPr id="7" name="Text 3"/>
+          <p:cNvSpPr txBox="1"/>
+          <p:nvPr/>
+        </p:nvSpPr>
+        <p:spPr>
+          <a:xfrm>
+            <a:off x="8540445" y="91440"/>
+            <a:ext cx="3066034" cy="274320"/>
+          </a:xfrm>
+          <a:prstGeom prst="rect">
+            <a:avLst/>
+          </a:prstGeom>
+          <a:noFill/>
+          <a:ln/>
+        </p:spPr>
+        <p:txBody>
+          <a:bodyPr wrap="square" lIns="0" tIns="0" rIns="0" bIns="0" rtlCol="0" anchor="ctr"/>
+          <a:lstStyle/>
+          <a:p>
+            <a:pPr indent="0" marL="0">
+              <a:buNone/>
+            </a:pPr>
+            <a:r>
+              <a:rPr lang="en-US" sz="1100" b="1" dirty="0">
+                <a:solidFill>
+                  <a:srgbClr val="075985"/>
+                </a:solidFill>
+                <a:latin typeface="Calibri" pitchFamily="34" charset="0"/>
+                <a:ea typeface="Calibri" pitchFamily="34" charset="-122"/>
+                <a:cs typeface="Calibri" pitchFamily="34" charset="-120"/>
+              </a:rPr>
+              <a:t>UNDERSTAND NOW</a:t>
+            </a:r>
+            <a:pPr indent="0" marL="0">
+              <a:buNone/>
+            </a:pPr>
+            <a:r>
+              <a:rPr lang="en-US" sz="1100" dirty="0">
+                <a:solidFill>
+                  <a:srgbClr val="075985"/>
+                </a:solidFill>
+                <a:latin typeface="Calibri" pitchFamily="34" charset="0"/>
+                <a:ea typeface="Calibri" pitchFamily="34" charset="-122"/>
+                <a:cs typeface="Calibri" pitchFamily="34" charset="-120"/>
+              </a:rPr>
+              <a:t> · the registers of RISC-V</a:t>
+            </a:r>
+            <a:endParaRPr lang="en-US" sz="1100" dirty="0"/>
+          </a:p>
+        </p:txBody>
+      </p:sp>
       <p:sp>
         <p:nvSpPr>
           <p:cNvPr id="25" name="Slide Number Placeholder 0"/>

--- a/en/slides/18-Computer_Architecture-Processor.pptx
+++ b/en/slides/18-Computer_Architecture-Processor.pptx
@@ -126,13 +126,13 @@
   <p:extLst>
     <p:ext uri="{521415D9-36F7-43E2-AB2F-B90AF26B5E84}">
       <p14:sectionLst xmlns:p14="http://schemas.microsoft.com/office/powerpoint/2010/main">
-        <p14:section name="Opening" id="{c66ea04c-3690-e925-138a-b2a7550e21e1}">
+        <p14:section name="Opening" id="{f916fe92-53f9-2d77-e139-8b5a3d6a920d}">
           <p14:sldIdLst>
             <p14:sldId id="256"/>
             <p14:sldId id="257"/>
           </p14:sldIdLst>
         </p14:section>
-        <p14:section name="The processor" id="{bc7e9608-51b8-b5a1-de19-2ffce04120c1}">
+        <p14:section name="The processor" id="{e06fecab-85db-501e-835d-4f99157493b5}">
           <p14:sldIdLst>
             <p14:sldId id="258"/>
             <p14:sldId id="259"/>
@@ -141,7 +141,7 @@
             <p14:sldId id="262"/>
           </p14:sldIdLst>
         </p14:section>
-        <p14:section name="Registers" id="{aa3327e0-6855-bb07-4f61-30e1f8c8ff46}">
+        <p14:section name="Registers" id="{b637ce83-23e6-2622-c4c8-f822a6d90ffb}">
           <p14:sldIdLst>
             <p14:sldId id="263"/>
             <p14:sldId id="264"/>
@@ -149,18 +149,18 @@
             <p14:sldId id="266"/>
           </p14:sldIdLst>
         </p14:section>
-        <p14:section name="The stack" id="{2b80df95-07e0-f5b2-484e-e22def0b325c}">
+        <p14:section name="The stack" id="{9b93679c-a8a8-3400-492a-078c9d998c4e}">
           <p14:sldIdLst>
             <p14:sldId id="267"/>
           </p14:sldIdLst>
         </p14:section>
-        <p14:section name="Processor models" id="{d0ff31fb-c547-a56d-bb04-9132a7acfe6c}">
+        <p14:section name="Processor models" id="{7b82fc54-0a42-7121-1be0-7285abb937ad}">
           <p14:sldIdLst>
             <p14:sldId id="268"/>
             <p14:sldId id="269"/>
           </p14:sldIdLst>
         </p14:section>
-        <p14:section name="The ALU and the whole picture" id="{bce8b891-d0e5-5cea-08d1-c096764db47f}">
+        <p14:section name="The ALU and the whole picture" id="{bc9248fc-80e6-e205-dfa1-ea3a368304e6}">
           <p14:sldIdLst>
             <p14:sldId id="270"/>
             <p14:sldId id="271"/>
@@ -2285,7 +2285,7 @@
               <a:rPr lang="en-US" dirty="0"/>
               <a:t>The complete table of the registers of RISC-V, with numbers, names and roles. You have used most of them: zero, ra, sp, the temporaries t0 to t6, the arguments a0 to a7, the saved registers s0 to s11. Two are new: gp and tp, used by compilers and operating systems. The hardware treats x1 to x31 identically; only x0 is special. The roles come from the calling convention. The program counter is not in the bank.
 UNDERSTAND NOW: the registers of RISC-V; the calling convention.
-For the lecturer: The hardware treats x1 to x31 identically; only x0 is special. The roles come from the calling convention (Lecture 02). The MC68000 instead separated data registers D0-D7 from address registers A0-A7, with A7 as stack pointer.</a:t>
+For the lecturer: The hardware treats x1 to x31 identically; only x0 is special. The roles come from the calling convention, met in Lecture 02 and stated here as a rule: a call may destroy ra, t and a registers (caller-saved: save them before the call if you still need them); it must return s registers and sp unchanged (callee-saved: a function that uses them saves them in its frame and restores them before ret). The MC68000 instead separated data registers D0-D7 from address registers A0-A7, with A7 as stack pointer.</a:t>
             </a:r>
             <a:endParaRPr lang="en-US" dirty="0"/>
           </a:p>
@@ -23642,7 +23642,7 @@
                         <a:buNone/>
                       </a:pPr>
                       <a:r>
-                        <a:rPr lang="en-US" sz="1700" b="1" dirty="0">
+                        <a:rPr lang="en-US" sz="1600" b="1" dirty="0">
                           <a:solidFill>
                             <a:srgbClr val="FFFFFF"/>
                           </a:solidFill>
@@ -23652,7 +23652,7 @@
                         </a:rPr>
                         <a:t>Register</a:t>
                       </a:r>
-                      <a:endParaRPr lang="en-US" sz="1700" dirty="0">
+                      <a:endParaRPr lang="en-US" sz="1600" dirty="0">
                         <a:latin typeface="Calibri" charset="0"/>
                         <a:ea typeface="Calibri" charset="0"/>
                         <a:cs typeface="Calibri" charset="0"/>
@@ -23710,7 +23710,7 @@
                         <a:buNone/>
                       </a:pPr>
                       <a:r>
-                        <a:rPr lang="en-US" sz="1700" b="1" dirty="0">
+                        <a:rPr lang="en-US" sz="1600" b="1" dirty="0">
                           <a:solidFill>
                             <a:srgbClr val="FFFFFF"/>
                           </a:solidFill>
@@ -23720,7 +23720,7 @@
                         </a:rPr>
                         <a:t>Name</a:t>
                       </a:r>
-                      <a:endParaRPr lang="en-US" sz="1700" dirty="0">
+                      <a:endParaRPr lang="en-US" sz="1600" dirty="0">
                         <a:latin typeface="Calibri" charset="0"/>
                         <a:ea typeface="Calibri" charset="0"/>
                         <a:cs typeface="Calibri" charset="0"/>
@@ -23778,7 +23778,7 @@
                         <a:buNone/>
                       </a:pPr>
                       <a:r>
-                        <a:rPr lang="en-US" sz="1700" b="1" dirty="0">
+                        <a:rPr lang="en-US" sz="1600" b="1" dirty="0">
                           <a:solidFill>
                             <a:srgbClr val="FFFFFF"/>
                           </a:solidFill>
@@ -23788,7 +23788,7 @@
                         </a:rPr>
                         <a:t>Function, by convention</a:t>
                       </a:r>
-                      <a:endParaRPr lang="en-US" sz="1700" dirty="0">
+                      <a:endParaRPr lang="en-US" sz="1600" dirty="0">
                         <a:latin typeface="Calibri" charset="0"/>
                         <a:ea typeface="Calibri" charset="0"/>
                         <a:cs typeface="Calibri" charset="0"/>
@@ -23846,7 +23846,7 @@
                         <a:buNone/>
                       </a:pPr>
                       <a:r>
-                        <a:rPr lang="en-US" sz="1700" b="1" dirty="0">
+                        <a:rPr lang="en-US" sz="1600" b="1" dirty="0">
                           <a:solidFill>
                             <a:srgbClr val="FFFFFF"/>
                           </a:solidFill>
@@ -23856,7 +23856,7 @@
                         </a:rPr>
                         <a:t>Register</a:t>
                       </a:r>
-                      <a:endParaRPr lang="en-US" sz="1700" dirty="0">
+                      <a:endParaRPr lang="en-US" sz="1600" dirty="0">
                         <a:latin typeface="Calibri" charset="0"/>
                         <a:ea typeface="Calibri" charset="0"/>
                         <a:cs typeface="Calibri" charset="0"/>
@@ -23914,7 +23914,7 @@
                         <a:buNone/>
                       </a:pPr>
                       <a:r>
-                        <a:rPr lang="en-US" sz="1700" b="1" dirty="0">
+                        <a:rPr lang="en-US" sz="1600" b="1" dirty="0">
                           <a:solidFill>
                             <a:srgbClr val="FFFFFF"/>
                           </a:solidFill>
@@ -23924,7 +23924,7 @@
                         </a:rPr>
                         <a:t>Name</a:t>
                       </a:r>
-                      <a:endParaRPr lang="en-US" sz="1700" dirty="0">
+                      <a:endParaRPr lang="en-US" sz="1600" dirty="0">
                         <a:latin typeface="Calibri" charset="0"/>
                         <a:ea typeface="Calibri" charset="0"/>
                         <a:cs typeface="Calibri" charset="0"/>
@@ -23982,7 +23982,7 @@
                         <a:buNone/>
                       </a:pPr>
                       <a:r>
-                        <a:rPr lang="en-US" sz="1700" b="1" dirty="0">
+                        <a:rPr lang="en-US" sz="1600" b="1" dirty="0">
                           <a:solidFill>
                             <a:srgbClr val="FFFFFF"/>
                           </a:solidFill>
@@ -23992,7 +23992,7 @@
                         </a:rPr>
                         <a:t>Function, by convention</a:t>
                       </a:r>
-                      <a:endParaRPr lang="en-US" sz="1700" dirty="0">
+                      <a:endParaRPr lang="en-US" sz="1600" dirty="0">
                         <a:latin typeface="Calibri" charset="0"/>
                         <a:ea typeface="Calibri" charset="0"/>
                         <a:cs typeface="Calibri" charset="0"/>
@@ -24052,7 +24052,7 @@
                         <a:buNone/>
                       </a:pPr>
                       <a:r>
-                        <a:rPr lang="en-US" sz="1700" dirty="0">
+                        <a:rPr lang="en-US" sz="1600" dirty="0">
                           <a:solidFill>
                             <a:srgbClr val="1B2530"/>
                           </a:solidFill>
@@ -24062,7 +24062,7 @@
                         </a:rPr>
                         <a:t>x0</a:t>
                       </a:r>
-                      <a:endParaRPr lang="en-US" sz="1700" dirty="0">
+                      <a:endParaRPr lang="en-US" sz="1600" dirty="0">
                         <a:latin typeface="Courier New" charset="0"/>
                         <a:ea typeface="Courier New" charset="0"/>
                         <a:cs typeface="Courier New" charset="0"/>
@@ -24120,7 +24120,7 @@
                         <a:buNone/>
                       </a:pPr>
                       <a:r>
-                        <a:rPr lang="en-US" sz="1700" dirty="0">
+                        <a:rPr lang="en-US" sz="1600" dirty="0">
                           <a:solidFill>
                             <a:srgbClr val="1B2530"/>
                           </a:solidFill>
@@ -24130,7 +24130,7 @@
                         </a:rPr>
                         <a:t>zero</a:t>
                       </a:r>
-                      <a:endParaRPr lang="en-US" sz="1700" dirty="0">
+                      <a:endParaRPr lang="en-US" sz="1600" dirty="0">
                         <a:latin typeface="Courier New" charset="0"/>
                         <a:ea typeface="Courier New" charset="0"/>
                         <a:cs typeface="Courier New" charset="0"/>
@@ -24188,7 +24188,7 @@
                         <a:buNone/>
                       </a:pPr>
                       <a:r>
-                        <a:rPr lang="en-US" sz="1700" dirty="0">
+                        <a:rPr lang="en-US" sz="1600" dirty="0">
                           <a:solidFill>
                             <a:srgbClr val="1B2530"/>
                           </a:solidFill>
@@ -24198,7 +24198,7 @@
                         </a:rPr>
                         <a:t>always 0</a:t>
                       </a:r>
-                      <a:endParaRPr lang="en-US" sz="1700" dirty="0">
+                      <a:endParaRPr lang="en-US" sz="1600" dirty="0">
                         <a:latin typeface="Calibri" charset="0"/>
                         <a:ea typeface="Calibri" charset="0"/>
                         <a:cs typeface="Calibri" charset="0"/>
@@ -24256,7 +24256,7 @@
                         <a:buNone/>
                       </a:pPr>
                       <a:r>
-                        <a:rPr lang="en-US" sz="1700" dirty="0">
+                        <a:rPr lang="en-US" sz="1600" dirty="0">
                           <a:solidFill>
                             <a:srgbClr val="1B2530"/>
                           </a:solidFill>
@@ -24266,7 +24266,7 @@
                         </a:rPr>
                         <a:t>x8 - x9</a:t>
                       </a:r>
-                      <a:endParaRPr lang="en-US" sz="1700" dirty="0">
+                      <a:endParaRPr lang="en-US" sz="1600" dirty="0">
                         <a:latin typeface="Courier New" charset="0"/>
                         <a:ea typeface="Courier New" charset="0"/>
                         <a:cs typeface="Courier New" charset="0"/>
@@ -24324,7 +24324,7 @@
                         <a:buNone/>
                       </a:pPr>
                       <a:r>
-                        <a:rPr lang="en-US" sz="1700" dirty="0">
+                        <a:rPr lang="en-US" sz="1600" dirty="0">
                           <a:solidFill>
                             <a:srgbClr val="1B2530"/>
                           </a:solidFill>
@@ -24334,7 +24334,7 @@
                         </a:rPr>
                         <a:t>s0 - s1</a:t>
                       </a:r>
-                      <a:endParaRPr lang="en-US" sz="1700" dirty="0">
+                      <a:endParaRPr lang="en-US" sz="1600" dirty="0">
                         <a:latin typeface="Courier New" charset="0"/>
                         <a:ea typeface="Courier New" charset="0"/>
                         <a:cs typeface="Courier New" charset="0"/>
@@ -24392,7 +24392,7 @@
                         <a:buNone/>
                       </a:pPr>
                       <a:r>
-                        <a:rPr lang="en-US" sz="1700" dirty="0">
+                        <a:rPr lang="en-US" sz="1600" dirty="0">
                           <a:solidFill>
                             <a:srgbClr val="1B2530"/>
                           </a:solidFill>
@@ -24402,7 +24402,7 @@
                         </a:rPr>
                         <a:t>saved</a:t>
                       </a:r>
-                      <a:endParaRPr lang="en-US" sz="1700" dirty="0">
+                      <a:endParaRPr lang="en-US" sz="1600" dirty="0">
                         <a:latin typeface="Calibri" charset="0"/>
                         <a:ea typeface="Calibri" charset="0"/>
                         <a:cs typeface="Calibri" charset="0"/>
@@ -24462,7 +24462,7 @@
                         <a:buNone/>
                       </a:pPr>
                       <a:r>
-                        <a:rPr lang="en-US" sz="1700" dirty="0">
+                        <a:rPr lang="en-US" sz="1600" dirty="0">
                           <a:solidFill>
                             <a:srgbClr val="1B2530"/>
                           </a:solidFill>
@@ -24472,7 +24472,7 @@
                         </a:rPr>
                         <a:t>x1</a:t>
                       </a:r>
-                      <a:endParaRPr lang="en-US" sz="1700" dirty="0">
+                      <a:endParaRPr lang="en-US" sz="1600" dirty="0">
                         <a:latin typeface="Courier New" charset="0"/>
                         <a:ea typeface="Courier New" charset="0"/>
                         <a:cs typeface="Courier New" charset="0"/>
@@ -24530,7 +24530,7 @@
                         <a:buNone/>
                       </a:pPr>
                       <a:r>
-                        <a:rPr lang="en-US" sz="1700" dirty="0">
+                        <a:rPr lang="en-US" sz="1600" dirty="0">
                           <a:solidFill>
                             <a:srgbClr val="1B2530"/>
                           </a:solidFill>
@@ -24540,7 +24540,7 @@
                         </a:rPr>
                         <a:t>ra</a:t>
                       </a:r>
-                      <a:endParaRPr lang="en-US" sz="1700" dirty="0">
+                      <a:endParaRPr lang="en-US" sz="1600" dirty="0">
                         <a:latin typeface="Courier New" charset="0"/>
                         <a:ea typeface="Courier New" charset="0"/>
                         <a:cs typeface="Courier New" charset="0"/>
@@ -24598,7 +24598,7 @@
                         <a:buNone/>
                       </a:pPr>
                       <a:r>
-                        <a:rPr lang="en-US" sz="1700" dirty="0">
+                        <a:rPr lang="en-US" sz="1600" dirty="0">
                           <a:solidFill>
                             <a:srgbClr val="1B2530"/>
                           </a:solidFill>
@@ -24608,7 +24608,7 @@
                         </a:rPr>
                         <a:t>return address</a:t>
                       </a:r>
-                      <a:endParaRPr lang="en-US" sz="1700" dirty="0">
+                      <a:endParaRPr lang="en-US" sz="1600" dirty="0">
                         <a:latin typeface="Calibri" charset="0"/>
                         <a:ea typeface="Calibri" charset="0"/>
                         <a:cs typeface="Calibri" charset="0"/>
@@ -24666,7 +24666,7 @@
                         <a:buNone/>
                       </a:pPr>
                       <a:r>
-                        <a:rPr lang="en-US" sz="1700" dirty="0">
+                        <a:rPr lang="en-US" sz="1600" dirty="0">
                           <a:solidFill>
                             <a:srgbClr val="1B2530"/>
                           </a:solidFill>
@@ -24676,7 +24676,7 @@
                         </a:rPr>
                         <a:t>x10 - x11</a:t>
                       </a:r>
-                      <a:endParaRPr lang="en-US" sz="1700" dirty="0">
+                      <a:endParaRPr lang="en-US" sz="1600" dirty="0">
                         <a:latin typeface="Courier New" charset="0"/>
                         <a:ea typeface="Courier New" charset="0"/>
                         <a:cs typeface="Courier New" charset="0"/>
@@ -24734,7 +24734,7 @@
                         <a:buNone/>
                       </a:pPr>
                       <a:r>
-                        <a:rPr lang="en-US" sz="1700" dirty="0">
+                        <a:rPr lang="en-US" sz="1600" dirty="0">
                           <a:solidFill>
                             <a:srgbClr val="1B2530"/>
                           </a:solidFill>
@@ -24744,7 +24744,7 @@
                         </a:rPr>
                         <a:t>a0 - a1</a:t>
                       </a:r>
-                      <a:endParaRPr lang="en-US" sz="1700" dirty="0">
+                      <a:endParaRPr lang="en-US" sz="1600" dirty="0">
                         <a:latin typeface="Courier New" charset="0"/>
                         <a:ea typeface="Courier New" charset="0"/>
                         <a:cs typeface="Courier New" charset="0"/>
@@ -24802,7 +24802,7 @@
                         <a:buNone/>
                       </a:pPr>
                       <a:r>
-                        <a:rPr lang="en-US" sz="1700" dirty="0">
+                        <a:rPr lang="en-US" sz="1600" dirty="0">
                           <a:solidFill>
                             <a:srgbClr val="1B2530"/>
                           </a:solidFill>
@@ -24812,7 +24812,7 @@
                         </a:rPr>
                         <a:t>arguments, results</a:t>
                       </a:r>
-                      <a:endParaRPr lang="en-US" sz="1700" dirty="0">
+                      <a:endParaRPr lang="en-US" sz="1600" dirty="0">
                         <a:latin typeface="Calibri" charset="0"/>
                         <a:ea typeface="Calibri" charset="0"/>
                         <a:cs typeface="Calibri" charset="0"/>
@@ -24872,7 +24872,7 @@
                         <a:buNone/>
                       </a:pPr>
                       <a:r>
-                        <a:rPr lang="en-US" sz="1700" dirty="0">
+                        <a:rPr lang="en-US" sz="1600" dirty="0">
                           <a:solidFill>
                             <a:srgbClr val="1B2530"/>
                           </a:solidFill>
@@ -24882,7 +24882,7 @@
                         </a:rPr>
                         <a:t>x2</a:t>
                       </a:r>
-                      <a:endParaRPr lang="en-US" sz="1700" dirty="0">
+                      <a:endParaRPr lang="en-US" sz="1600" dirty="0">
                         <a:latin typeface="Courier New" charset="0"/>
                         <a:ea typeface="Courier New" charset="0"/>
                         <a:cs typeface="Courier New" charset="0"/>
@@ -24940,7 +24940,7 @@
                         <a:buNone/>
                       </a:pPr>
                       <a:r>
-                        <a:rPr lang="en-US" sz="1700" dirty="0">
+                        <a:rPr lang="en-US" sz="1600" dirty="0">
                           <a:solidFill>
                             <a:srgbClr val="1B2530"/>
                           </a:solidFill>
@@ -24950,7 +24950,7 @@
                         </a:rPr>
                         <a:t>sp</a:t>
                       </a:r>
-                      <a:endParaRPr lang="en-US" sz="1700" dirty="0">
+                      <a:endParaRPr lang="en-US" sz="1600" dirty="0">
                         <a:latin typeface="Courier New" charset="0"/>
                         <a:ea typeface="Courier New" charset="0"/>
                         <a:cs typeface="Courier New" charset="0"/>
@@ -25008,7 +25008,7 @@
                         <a:buNone/>
                       </a:pPr>
                       <a:r>
-                        <a:rPr lang="en-US" sz="1700" dirty="0">
+                        <a:rPr lang="en-US" sz="1600" dirty="0">
                           <a:solidFill>
                             <a:srgbClr val="1B2530"/>
                           </a:solidFill>
@@ -25018,7 +25018,7 @@
                         </a:rPr>
                         <a:t>stack pointer</a:t>
                       </a:r>
-                      <a:endParaRPr lang="en-US" sz="1700" dirty="0">
+                      <a:endParaRPr lang="en-US" sz="1600" dirty="0">
                         <a:latin typeface="Calibri" charset="0"/>
                         <a:ea typeface="Calibri" charset="0"/>
                         <a:cs typeface="Calibri" charset="0"/>
@@ -25076,7 +25076,7 @@
                         <a:buNone/>
                       </a:pPr>
                       <a:r>
-                        <a:rPr lang="en-US" sz="1700" dirty="0">
+                        <a:rPr lang="en-US" sz="1600" dirty="0">
                           <a:solidFill>
                             <a:srgbClr val="1B2530"/>
                           </a:solidFill>
@@ -25086,7 +25086,7 @@
                         </a:rPr>
                         <a:t>x12 - x17</a:t>
                       </a:r>
-                      <a:endParaRPr lang="en-US" sz="1700" dirty="0">
+                      <a:endParaRPr lang="en-US" sz="1600" dirty="0">
                         <a:latin typeface="Courier New" charset="0"/>
                         <a:ea typeface="Courier New" charset="0"/>
                         <a:cs typeface="Courier New" charset="0"/>
@@ -25144,7 +25144,7 @@
                         <a:buNone/>
                       </a:pPr>
                       <a:r>
-                        <a:rPr lang="en-US" sz="1700" dirty="0">
+                        <a:rPr lang="en-US" sz="1600" dirty="0">
                           <a:solidFill>
                             <a:srgbClr val="1B2530"/>
                           </a:solidFill>
@@ -25154,7 +25154,7 @@
                         </a:rPr>
                         <a:t>a2 - a7</a:t>
                       </a:r>
-                      <a:endParaRPr lang="en-US" sz="1700" dirty="0">
+                      <a:endParaRPr lang="en-US" sz="1600" dirty="0">
                         <a:latin typeface="Courier New" charset="0"/>
                         <a:ea typeface="Courier New" charset="0"/>
                         <a:cs typeface="Courier New" charset="0"/>
@@ -25212,7 +25212,7 @@
                         <a:buNone/>
                       </a:pPr>
                       <a:r>
-                        <a:rPr lang="en-US" sz="1700" dirty="0">
+                        <a:rPr lang="en-US" sz="1600" dirty="0">
                           <a:solidFill>
                             <a:srgbClr val="1B2530"/>
                           </a:solidFill>
@@ -25222,7 +25222,7 @@
                         </a:rPr>
                         <a:t>arguments</a:t>
                       </a:r>
-                      <a:endParaRPr lang="en-US" sz="1700" dirty="0">
+                      <a:endParaRPr lang="en-US" sz="1600" dirty="0">
                         <a:latin typeface="Calibri" charset="0"/>
                         <a:ea typeface="Calibri" charset="0"/>
                         <a:cs typeface="Calibri" charset="0"/>
@@ -25282,7 +25282,7 @@
                         <a:buNone/>
                       </a:pPr>
                       <a:r>
-                        <a:rPr lang="en-US" sz="1700" dirty="0">
+                        <a:rPr lang="en-US" sz="1600" dirty="0">
                           <a:solidFill>
                             <a:srgbClr val="1B2530"/>
                           </a:solidFill>
@@ -25292,7 +25292,7 @@
                         </a:rPr>
                         <a:t>x3</a:t>
                       </a:r>
-                      <a:endParaRPr lang="en-US" sz="1700" dirty="0">
+                      <a:endParaRPr lang="en-US" sz="1600" dirty="0">
                         <a:latin typeface="Courier New" charset="0"/>
                         <a:ea typeface="Courier New" charset="0"/>
                         <a:cs typeface="Courier New" charset="0"/>
@@ -25350,7 +25350,7 @@
                         <a:buNone/>
                       </a:pPr>
                       <a:r>
-                        <a:rPr lang="en-US" sz="1700" dirty="0">
+                        <a:rPr lang="en-US" sz="1600" dirty="0">
                           <a:solidFill>
                             <a:srgbClr val="1B2530"/>
                           </a:solidFill>
@@ -25360,7 +25360,7 @@
                         </a:rPr>
                         <a:t>gp</a:t>
                       </a:r>
-                      <a:endParaRPr lang="en-US" sz="1700" dirty="0">
+                      <a:endParaRPr lang="en-US" sz="1600" dirty="0">
                         <a:latin typeface="Courier New" charset="0"/>
                         <a:ea typeface="Courier New" charset="0"/>
                         <a:cs typeface="Courier New" charset="0"/>
@@ -25418,7 +25418,7 @@
                         <a:buNone/>
                       </a:pPr>
                       <a:r>
-                        <a:rPr lang="en-US" sz="1700" dirty="0">
+                        <a:rPr lang="en-US" sz="1600" dirty="0">
                           <a:solidFill>
                             <a:srgbClr val="1B2530"/>
                           </a:solidFill>
@@ -25428,7 +25428,7 @@
                         </a:rPr>
                         <a:t>global pointer</a:t>
                       </a:r>
-                      <a:endParaRPr lang="en-US" sz="1700" dirty="0">
+                      <a:endParaRPr lang="en-US" sz="1600" dirty="0">
                         <a:latin typeface="Calibri" charset="0"/>
                         <a:ea typeface="Calibri" charset="0"/>
                         <a:cs typeface="Calibri" charset="0"/>
@@ -25486,7 +25486,7 @@
                         <a:buNone/>
                       </a:pPr>
                       <a:r>
-                        <a:rPr lang="en-US" sz="1700" dirty="0">
+                        <a:rPr lang="en-US" sz="1600" dirty="0">
                           <a:solidFill>
                             <a:srgbClr val="1B2530"/>
                           </a:solidFill>
@@ -25496,7 +25496,7 @@
                         </a:rPr>
                         <a:t>x18 - x27</a:t>
                       </a:r>
-                      <a:endParaRPr lang="en-US" sz="1700" dirty="0">
+                      <a:endParaRPr lang="en-US" sz="1600" dirty="0">
                         <a:latin typeface="Courier New" charset="0"/>
                         <a:ea typeface="Courier New" charset="0"/>
                         <a:cs typeface="Courier New" charset="0"/>
@@ -25554,7 +25554,7 @@
                         <a:buNone/>
                       </a:pPr>
                       <a:r>
-                        <a:rPr lang="en-US" sz="1700" dirty="0">
+                        <a:rPr lang="en-US" sz="1600" dirty="0">
                           <a:solidFill>
                             <a:srgbClr val="1B2530"/>
                           </a:solidFill>
@@ -25564,7 +25564,7 @@
                         </a:rPr>
                         <a:t>s2 - s11</a:t>
                       </a:r>
-                      <a:endParaRPr lang="en-US" sz="1700" dirty="0">
+                      <a:endParaRPr lang="en-US" sz="1600" dirty="0">
                         <a:latin typeface="Courier New" charset="0"/>
                         <a:ea typeface="Courier New" charset="0"/>
                         <a:cs typeface="Courier New" charset="0"/>
@@ -25622,7 +25622,7 @@
                         <a:buNone/>
                       </a:pPr>
                       <a:r>
-                        <a:rPr lang="en-US" sz="1700" dirty="0">
+                        <a:rPr lang="en-US" sz="1600" dirty="0">
                           <a:solidFill>
                             <a:srgbClr val="1B2530"/>
                           </a:solidFill>
@@ -25632,7 +25632,7 @@
                         </a:rPr>
                         <a:t>saved</a:t>
                       </a:r>
-                      <a:endParaRPr lang="en-US" sz="1700" dirty="0">
+                      <a:endParaRPr lang="en-US" sz="1600" dirty="0">
                         <a:latin typeface="Calibri" charset="0"/>
                         <a:ea typeface="Calibri" charset="0"/>
                         <a:cs typeface="Calibri" charset="0"/>
@@ -25692,7 +25692,7 @@
                         <a:buNone/>
                       </a:pPr>
                       <a:r>
-                        <a:rPr lang="en-US" sz="1700" dirty="0">
+                        <a:rPr lang="en-US" sz="1600" dirty="0">
                           <a:solidFill>
                             <a:srgbClr val="1B2530"/>
                           </a:solidFill>
@@ -25702,7 +25702,7 @@
                         </a:rPr>
                         <a:t>x4</a:t>
                       </a:r>
-                      <a:endParaRPr lang="en-US" sz="1700" dirty="0">
+                      <a:endParaRPr lang="en-US" sz="1600" dirty="0">
                         <a:latin typeface="Courier New" charset="0"/>
                         <a:ea typeface="Courier New" charset="0"/>
                         <a:cs typeface="Courier New" charset="0"/>
@@ -25760,7 +25760,7 @@
                         <a:buNone/>
                       </a:pPr>
                       <a:r>
-                        <a:rPr lang="en-US" sz="1700" dirty="0">
+                        <a:rPr lang="en-US" sz="1600" dirty="0">
                           <a:solidFill>
                             <a:srgbClr val="1B2530"/>
                           </a:solidFill>
@@ -25770,7 +25770,7 @@
                         </a:rPr>
                         <a:t>tp</a:t>
                       </a:r>
-                      <a:endParaRPr lang="en-US" sz="1700" dirty="0">
+                      <a:endParaRPr lang="en-US" sz="1600" dirty="0">
                         <a:latin typeface="Courier New" charset="0"/>
                         <a:ea typeface="Courier New" charset="0"/>
                         <a:cs typeface="Courier New" charset="0"/>
@@ -25828,7 +25828,7 @@
                         <a:buNone/>
                       </a:pPr>
                       <a:r>
-                        <a:rPr lang="en-US" sz="1700" dirty="0">
+                        <a:rPr lang="en-US" sz="1600" dirty="0">
                           <a:solidFill>
                             <a:srgbClr val="1B2530"/>
                           </a:solidFill>
@@ -25838,7 +25838,7 @@
                         </a:rPr>
                         <a:t>thread pointer</a:t>
                       </a:r>
-                      <a:endParaRPr lang="en-US" sz="1700" dirty="0">
+                      <a:endParaRPr lang="en-US" sz="1600" dirty="0">
                         <a:latin typeface="Calibri" charset="0"/>
                         <a:ea typeface="Calibri" charset="0"/>
                         <a:cs typeface="Calibri" charset="0"/>
@@ -25896,7 +25896,7 @@
                         <a:buNone/>
                       </a:pPr>
                       <a:r>
-                        <a:rPr lang="en-US" sz="1700" dirty="0">
+                        <a:rPr lang="en-US" sz="1600" dirty="0">
                           <a:solidFill>
                             <a:srgbClr val="1B2530"/>
                           </a:solidFill>
@@ -25906,7 +25906,7 @@
                         </a:rPr>
                         <a:t>x28 - x31</a:t>
                       </a:r>
-                      <a:endParaRPr lang="en-US" sz="1700" dirty="0">
+                      <a:endParaRPr lang="en-US" sz="1600" dirty="0">
                         <a:latin typeface="Courier New" charset="0"/>
                         <a:ea typeface="Courier New" charset="0"/>
                         <a:cs typeface="Courier New" charset="0"/>
@@ -25964,7 +25964,7 @@
                         <a:buNone/>
                       </a:pPr>
                       <a:r>
-                        <a:rPr lang="en-US" sz="1700" dirty="0">
+                        <a:rPr lang="en-US" sz="1600" dirty="0">
                           <a:solidFill>
                             <a:srgbClr val="1B2530"/>
                           </a:solidFill>
@@ -25974,7 +25974,7 @@
                         </a:rPr>
                         <a:t>t3 - t6</a:t>
                       </a:r>
-                      <a:endParaRPr lang="en-US" sz="1700" dirty="0">
+                      <a:endParaRPr lang="en-US" sz="1600" dirty="0">
                         <a:latin typeface="Courier New" charset="0"/>
                         <a:ea typeface="Courier New" charset="0"/>
                         <a:cs typeface="Courier New" charset="0"/>
@@ -26032,7 +26032,7 @@
                         <a:buNone/>
                       </a:pPr>
                       <a:r>
-                        <a:rPr lang="en-US" sz="1700" dirty="0">
+                        <a:rPr lang="en-US" sz="1600" dirty="0">
                           <a:solidFill>
                             <a:srgbClr val="1B2530"/>
                           </a:solidFill>
@@ -26042,7 +26042,7 @@
                         </a:rPr>
                         <a:t>temporaries</a:t>
                       </a:r>
-                      <a:endParaRPr lang="en-US" sz="1700" dirty="0">
+                      <a:endParaRPr lang="en-US" sz="1600" dirty="0">
                         <a:latin typeface="Calibri" charset="0"/>
                         <a:ea typeface="Calibri" charset="0"/>
                         <a:cs typeface="Calibri" charset="0"/>
@@ -26102,7 +26102,7 @@
                         <a:buNone/>
                       </a:pPr>
                       <a:r>
-                        <a:rPr lang="en-US" sz="1700" dirty="0">
+                        <a:rPr lang="en-US" sz="1600" dirty="0">
                           <a:solidFill>
                             <a:srgbClr val="1B2530"/>
                           </a:solidFill>
@@ -26112,7 +26112,7 @@
                         </a:rPr>
                         <a:t>x5 - x7</a:t>
                       </a:r>
-                      <a:endParaRPr lang="en-US" sz="1700" dirty="0">
+                      <a:endParaRPr lang="en-US" sz="1600" dirty="0">
                         <a:latin typeface="Courier New" charset="0"/>
                         <a:ea typeface="Courier New" charset="0"/>
                         <a:cs typeface="Courier New" charset="0"/>
@@ -26170,7 +26170,7 @@
                         <a:buNone/>
                       </a:pPr>
                       <a:r>
-                        <a:rPr lang="en-US" sz="1700" dirty="0">
+                        <a:rPr lang="en-US" sz="1600" dirty="0">
                           <a:solidFill>
                             <a:srgbClr val="1B2530"/>
                           </a:solidFill>
@@ -26180,7 +26180,7 @@
                         </a:rPr>
                         <a:t>t0 - t2</a:t>
                       </a:r>
-                      <a:endParaRPr lang="en-US" sz="1700" dirty="0">
+                      <a:endParaRPr lang="en-US" sz="1600" dirty="0">
                         <a:latin typeface="Courier New" charset="0"/>
                         <a:ea typeface="Courier New" charset="0"/>
                         <a:cs typeface="Courier New" charset="0"/>
@@ -26238,7 +26238,7 @@
                         <a:buNone/>
                       </a:pPr>
                       <a:r>
-                        <a:rPr lang="en-US" sz="1700" dirty="0">
+                        <a:rPr lang="en-US" sz="1600" dirty="0">
                           <a:solidFill>
                             <a:srgbClr val="1B2530"/>
                           </a:solidFill>
@@ -26248,7 +26248,7 @@
                         </a:rPr>
                         <a:t>temporaries</a:t>
                       </a:r>
-                      <a:endParaRPr lang="en-US" sz="1700" dirty="0">
+                      <a:endParaRPr lang="en-US" sz="1600" dirty="0">
                         <a:latin typeface="Calibri" charset="0"/>
                         <a:ea typeface="Calibri" charset="0"/>
                         <a:cs typeface="Calibri" charset="0"/>
@@ -26306,7 +26306,7 @@
                         <a:buNone/>
                       </a:pPr>
                       <a:r>
-                        <a:rPr lang="en-US" sz="1700" dirty="0">
+                        <a:rPr lang="en-US" sz="1600" dirty="0">
                           <a:solidFill>
                             <a:srgbClr val="1B2530"/>
                           </a:solidFill>
@@ -26316,7 +26316,7 @@
                         </a:rPr>
                         <a:t>pc</a:t>
                       </a:r>
-                      <a:endParaRPr lang="en-US" sz="1700" dirty="0">
+                      <a:endParaRPr lang="en-US" sz="1600" dirty="0">
                         <a:latin typeface="Courier New" charset="0"/>
                         <a:ea typeface="Courier New" charset="0"/>
                         <a:cs typeface="Courier New" charset="0"/>
@@ -26374,7 +26374,7 @@
                         <a:buNone/>
                       </a:pPr>
                       <a:r>
-                        <a:rPr lang="en-US" sz="1700" dirty="0">
+                        <a:rPr lang="en-US" sz="1600" dirty="0">
                           <a:solidFill>
                             <a:srgbClr val="1B2530"/>
                           </a:solidFill>
@@ -26384,7 +26384,7 @@
                         </a:rPr>
                         <a:t>-</a:t>
                       </a:r>
-                      <a:endParaRPr lang="en-US" sz="1700" dirty="0">
+                      <a:endParaRPr lang="en-US" sz="1600" dirty="0">
                         <a:latin typeface="Courier New" charset="0"/>
                         <a:ea typeface="Courier New" charset="0"/>
                         <a:cs typeface="Courier New" charset="0"/>
@@ -26442,7 +26442,7 @@
                         <a:buNone/>
                       </a:pPr>
                       <a:r>
-                        <a:rPr lang="en-US" sz="1700" dirty="0">
+                        <a:rPr lang="en-US" sz="1600" dirty="0">
                           <a:solidFill>
                             <a:srgbClr val="1B2530"/>
                           </a:solidFill>
@@ -26452,7 +26452,7 @@
                         </a:rPr>
                         <a:t>program counter (not in the bank)</a:t>
                       </a:r>
-                      <a:endParaRPr lang="en-US" sz="1700" dirty="0">
+                      <a:endParaRPr lang="en-US" sz="1600" dirty="0">
                         <a:latin typeface="Calibri" charset="0"/>
                         <a:ea typeface="Calibri" charset="0"/>
                         <a:cs typeface="Calibri" charset="0"/>
@@ -26508,7 +26508,46 @@
       </p:graphicFrame>
       <p:sp>
         <p:nvSpPr>
-          <p:cNvPr id="4" name="Shape 1"/>
+          <p:cNvPr id="4" name="Text 1"/>
+          <p:cNvSpPr txBox="1"/>
+          <p:nvPr/>
+        </p:nvSpPr>
+        <p:spPr>
+          <a:xfrm>
+            <a:off x="548640" y="5760720"/>
+            <a:ext cx="11094415" cy="411480"/>
+          </a:xfrm>
+          <a:prstGeom prst="rect">
+            <a:avLst/>
+          </a:prstGeom>
+          <a:noFill/>
+          <a:ln/>
+        </p:spPr>
+        <p:txBody>
+          <a:bodyPr wrap="square" lIns="0" tIns="0" rIns="0" bIns="0" rtlCol="0" anchor="ctr"/>
+          <a:lstStyle/>
+          <a:p>
+            <a:pPr indent="0" marL="0">
+              <a:buNone/>
+            </a:pPr>
+            <a:r>
+              <a:rPr lang="en-US" sz="1400" i="1" dirty="0">
+                <a:solidFill>
+                  <a:srgbClr val="5B6B78"/>
+                </a:solidFill>
+                <a:latin typeface="Calibri" pitchFamily="34" charset="0"/>
+                <a:ea typeface="Calibri" pitchFamily="34" charset="-122"/>
+                <a:cs typeface="Calibri" pitchFamily="34" charset="-120"/>
+              </a:rPr>
+              <a:t>The rule of the convention: a call may destroy ra, t and a (caller-saved); s and sp come back unchanged (callee-saved).</a:t>
+            </a:r>
+            <a:endParaRPr lang="en-US" sz="1400" dirty="0"/>
+          </a:p>
+        </p:txBody>
+      </p:sp>
+      <p:sp>
+        <p:nvSpPr>
+          <p:cNvPr id="5" name="Shape 2"/>
           <p:cNvSpPr/>
           <p:nvPr/>
         </p:nvSpPr>
@@ -26533,7 +26572,7 @@
       </p:sp>
       <p:sp>
         <p:nvSpPr>
-          <p:cNvPr id="5" name="Shape 2"/>
+          <p:cNvPr id="6" name="Shape 3"/>
           <p:cNvSpPr/>
           <p:nvPr/>
         </p:nvSpPr>
@@ -26558,7 +26597,7 @@
       </p:sp>
       <p:pic>
         <p:nvPicPr>
-          <p:cNvPr id="6" name="Image 0" descr="preencoded.png">    </p:cNvPr>
+          <p:cNvPr id="7" name="Image 0" descr="preencoded.png">    </p:cNvPr>
           <p:cNvPicPr>
             <a:picLocks noChangeAspect="1"/>
           </p:cNvPicPr>
@@ -26582,7 +26621,7 @@
       </p:pic>
       <p:sp>
         <p:nvSpPr>
-          <p:cNvPr id="7" name="Text 3"/>
+          <p:cNvPr id="8" name="Text 4"/>
           <p:cNvSpPr txBox="1"/>
           <p:nvPr/>
         </p:nvSpPr>

--- a/en/slides/18-Computer_Architecture-Processor.pptx
+++ b/en/slides/18-Computer_Architecture-Processor.pptx
@@ -126,13 +126,13 @@
   <p:extLst>
     <p:ext uri="{521415D9-36F7-43E2-AB2F-B90AF26B5E84}">
       <p14:sectionLst xmlns:p14="http://schemas.microsoft.com/office/powerpoint/2010/main">
-        <p14:section name="Opening" id="{f916fe92-53f9-2d77-e139-8b5a3d6a920d}">
+        <p14:section name="Opening" id="{2fac30c6-1899-1a68-0d41-2491e2747a91}">
           <p14:sldIdLst>
             <p14:sldId id="256"/>
             <p14:sldId id="257"/>
           </p14:sldIdLst>
         </p14:section>
-        <p14:section name="The processor" id="{e06fecab-85db-501e-835d-4f99157493b5}">
+        <p14:section name="The processor" id="{725b57d8-1311-cba2-59d9-32b28760cff3}">
           <p14:sldIdLst>
             <p14:sldId id="258"/>
             <p14:sldId id="259"/>
@@ -141,7 +141,7 @@
             <p14:sldId id="262"/>
           </p14:sldIdLst>
         </p14:section>
-        <p14:section name="Registers" id="{b637ce83-23e6-2622-c4c8-f822a6d90ffb}">
+        <p14:section name="Registers" id="{93ceafe0-07ce-d9fd-9f54-d8815ac22f9a}">
           <p14:sldIdLst>
             <p14:sldId id="263"/>
             <p14:sldId id="264"/>
@@ -149,18 +149,18 @@
             <p14:sldId id="266"/>
           </p14:sldIdLst>
         </p14:section>
-        <p14:section name="The stack" id="{9b93679c-a8a8-3400-492a-078c9d998c4e}">
+        <p14:section name="The stack" id="{23d65db0-320f-b958-5eda-d5d545c5c14d}">
           <p14:sldIdLst>
             <p14:sldId id="267"/>
           </p14:sldIdLst>
         </p14:section>
-        <p14:section name="Processor models" id="{7b82fc54-0a42-7121-1be0-7285abb937ad}">
+        <p14:section name="Processor models" id="{c1e26560-ae66-668b-98a8-263b17ef1a04}">
           <p14:sldIdLst>
             <p14:sldId id="268"/>
             <p14:sldId id="269"/>
           </p14:sldIdLst>
         </p14:section>
-        <p14:section name="The ALU and the whole picture" id="{bc9248fc-80e6-e205-dfa1-ea3a368304e6}">
+        <p14:section name="The ALU and the whole picture" id="{9cf4024a-d5b8-578d-563a-80fd733f5fea}">
           <p14:sldIdLst>
             <p14:sldId id="270"/>
             <p14:sldId id="271"/>
@@ -574,7 +574,7 @@
           <a:p>
             <a:r>
               <a:rPr lang="en-US" dirty="0"/>
-              <a:t>The last block of the course opens the machine that has been running your programs. This lecture presents the processor twice: first as a general model, valid for every processor, with its control unit, registers, stack and arithmetic unit; then as RISC-V, the processor you have programmed since the first days. Each abstract element of the model already has, for you, a familiar name. The ring of the quotation is the processor itself: the one component that commands all the others.
+              <a:t>The final block of the course opens the machine that has been executing every program written so far. This lecture presents the processor twice: first as a general reference model, valid for any processor, with its control unit, registers, stack and arithmetic unit; then as RISC-V, the processor programmed since the first weeks. Every abstract element of the model already has, for the student, a familiar name, and the lecture's method is to make that correspondence explicit. The ring of the epigraph is the processor itself: the one component that commands all the others.
 Learning status: UNDERSTAND NOW, by the end of this lecture you explain it, trace it and apply it on your own; USE NOW, you follow and use the recipe today; how it works inside is explained later, or is not part of the course; UNDERSTAND LATER, recognise the name and what it is for; a later lecture explains it. A slide without a badge is context: a story, an example, a question, an exercise.
 Learning status of this lecture. UNDERSTAND NOW: accumulator, stack, registers; the processor model; the registers of RISC-V; the calling convention; the stack; the RV32 processor. USE NOW: the complete program, the PRG32 tools (used, not studied, in this course). UNDERSTAND LATER: interrupts and traps (Lecture 19). A slide without a badge is context: a story, an example, a question, an exercise.
 For the lecturer: The original deck presented a general processor model and ended with the architecture of the Motorola MC68000. Here the general model is kept and RISC-V (RV32IMAC, as on the ESP32-C6 of the PRG32 kit) is the reference: the students have programmed it since the first days, so every abstract element has a name they already know.</a:t>
@@ -665,7 +665,7 @@
           <a:p>
             <a:r>
               <a:rPr lang="en-US" dirty="0"/>
-              <a:t>Many processors have a status register whose bits, the flags, record the outcome of the last operation: zero, negative, overflow, carry. An instruction sets them, and a later conditional branch tests them. RISC-V has none. A branch compares two registers and jumps, all in one instruction; slt writes the result of a comparison in an ordinary register; carry and overflow are computed when needed, as in Lecture 05. Less hidden state means a simpler processor and simpler interrupts.
+              <a:t>Many processors have a status register whose bits, the flags, record the outcome of the last operation: zero, negative, overflow, carry. One instruction sets them and a later conditional branch tests them. RISC-V has none. A branch compares two registers and jumps, in a single instruction; slt writes the result of a comparison into an ordinary register; carry and overflow are computed when required, as in Lecture 05. Less hidden state means a simpler processor, simpler pipelining and simpler interrupt handling, since there is no implicit state to save.
 UNDERSTAND NOW: the registers of RISC-V.
 For the lecturer: Registro di stato. The original deck listed Z, N, P (positive), V, C and a parity bit.</a:t>
             </a:r>
@@ -755,7 +755,7 @@
           <a:p>
             <a:r>
               <a:rPr lang="en-US" dirty="0"/>
-              <a:t>The special registers of RISC-V are the control and status registers, CSRs: a separate bank, read and written only by privileged code with dedicated instructions. Five are worth knowing by name: mstatus, with the global interrupt enable; mtvec, the address of the routine that handles traps; mepc, the address of the interrupted instruction; mcause, the reason for the trap; and the pair mie and mip, with one bit per source of interrupt. The next lecture uses them all.
+              <a:t>The special registers of RISC-V are the control and status registers, CSRs: a separate bank, read and written only by privileged code through dedicated instructions. Five are worth knowing by name: mstatus, holding the global interrupt enable; mtvec, the address of the trap-handling routine; mepc, the address of the interrupted instruction; mcause, the reason for the trap; and the pair mie and mip, with one bit per interrupt source. The next lecture uses every one of them.
 UNDERSTAND NOW: the registers of RISC-V. UNDERSTAND LATER: interrupts and traps (studied in Lecture 19).
 For the lecturer: Control and status registers: a separate bank of up to 4,096 registers, read and written only with the instructions csrrw, csrrs and csrrc, and only by privileged code. They are the 'registers of the interrupts' of the general model, and the subject of Lecture 19.</a:t>
             </a:r>
@@ -845,7 +845,7 @@
           <a:p>
             <a:r>
               <a:rPr lang="en-US" dirty="0"/>
-              <a:t>A stack has two operations: push stores an element on top of the pile, pop removes the element on top. It always works on the top, so there is no need to say where: last in, first out. It is used to set aside the contents of registers that must be freed for a task and to restore them afterwards. It is implemented with a pointer that indicates the last element. Careful programs check for overflow on a push and for an empty stack on a pop.
+              <a:t>A stack supports two operations: push places an element on top, pop removes the topmost element. It always operates at the top, so no location need be specified: last in, first out. It serves to set aside the contents of registers that must be freed for a task and to restore them afterwards, in subroutine calls and in interrupts alike. It is implemented by a pointer indicating the last element stored. Careful programs check for overflow on a push and for an empty stack on a pop. The stack frame of Lecture 02 is now seen in its general form.
 UNDERSTAND NOW: the stack; the calling convention.
 For the lecturer: LIFO, last in, first out. You have used it since Lecture 02 to save ra.</a:t>
             </a:r>
@@ -935,7 +935,7 @@
           <a:p>
             <a:r>
               <a:rPr lang="en-US" dirty="0"/>
-              <a:t>Four architectures. With general registers the processor has a set of interchangeable registers. With an accumulator, arithmetic instructions have an implicit operand, one special register. In a stack machine there are neither, only a stack pointer, and instructions work on the top of the stack. An orthogonal architecture has a single bank of general registers, some of which also serve as stack pointer or in other special roles. RISC-V is of this last kind.
+              <a:t>Four processor architectures. With general registers the processor has a set of interchangeable registers. With an accumulator, arithmetic instructions have an implicit operand, one special register. In a stack machine there is neither, only a stack pointer, and instructions operate on the top of the stack. An orthogonal architecture has a single bank of general registers, some of which may also serve as stack pointer or in other special roles. RISC-V belongs to this last class.
 UNDERSTAND NOW: accumulator, stack, registers.
 For the lecturer: Modello a registri generici, ad accumulatore, a stack; architetture ortogonali. The original definition of orthogonal mentions a status register too; RISC-V is orthogonal and has not even that.</a:t>
             </a:r>
@@ -1025,7 +1025,7 @@
           <a:p>
             <a:r>
               <a:rPr lang="en-US" dirty="0"/>
-              <a:t>RISC-V is a load-store processor with general registers. Only loads and stores touch memory; every other instruction works from register to register, which is faster. Instructions have three operands, two sources and a destination, so that no value is destroyed unless you want it to be. Each instruction does one simple thing and has a fixed size, which makes it easy to decode and to execute in a pipeline. This is what RISC means. The seven lines of the warm-up are the price, and the simplicity of each line is the gain.
+              <a:t>RISC-V is a load-store processor with general registers. Only loads and stores access memory; every other instruction operates from register to register, which is faster. Instructions have three operands, two sources and a destination, so that no value is destroyed unless the programmer so chooses. Each instruction performs one simple operation and has a fixed size, which makes it easy to decode and to execute in a pipeline. This is what RISC means. The seven lines of the warm-up are the price of the design, and the simplicity of each line is its return.
 UNDERSTAND NOW: accumulator, stack, registers.
 For the lecturer: Register-to-register: [REGX] + [REGY] gives [REGZ]. The memory-to-register and register-to-memory forms of the original deck exist in CISC processors and are exactly what RISC gives up.</a:t>
             </a:r>
@@ -1115,7 +1115,7 @@
           <a:p>
             <a:r>
               <a:rPr lang="en-US" dirty="0"/>
-              <a:t>The block diagram of an RV32 processor, from left to right. The PC gives the address of the instruction. The instruction is fetched from memory. The decoder separates its fields and the control unit issues the commands. The register file provides the operands. The ALU computes, or forms an address. The data memory is read or written by loads and stores. Two paths go back: the result returns to the register named by rd, and the next value of the PC is PC plus 4 or the target of a branch. Every instruction you write travels along this path.
+              <a:t>The block diagram of an RV32 processor, read from left to right. The PC supplies the address of the instruction, which is fetched from memory. The decoder separates its fields and the control unit issues the corresponding signals. The register file provides the operands. The ALU computes a result or forms an address. The data memory is read or written by loads and stores. Two paths return: the result goes back to the register named by rd, and the next PC is either PC + 4 or the branch target. Every instruction written in the course travels along this path, and the machines of Lectures 11, 13 and 14 can all be located on it.
 UNDERSTAND NOW: the RV32 processor.
 For the lecturer: The classic single-cycle RISC-V datapath of Patterson and Hennessy, reduced to its blocks; instruction memory and data memory are the same address space, drawn twice for clarity. It replaces the slide 'Architettura del processore MC68000'.</a:t>
             </a:r>
@@ -1205,7 +1205,7 @@
           <a:p>
             <a:r>
               <a:rPr lang="en-US" dirty="0"/>
-              <a:t>The processor of the kit, in numbers: instruction set RV32IMAC; one main core at up to 160 MHz with a four-stage pipeline, and a second low-power core; machine and user modes; no floating point; 512 KB of SRAM, 320 KB of ROM and an external flash; radios and peripherals on the same chip. A complete computer in a few square millimetres, for about two euros: processor, memory and input/output are all there, as in the model.
+              <a:t>The processor of the kit, in figures: instruction set RV32IMAC; one main core at up to 160 MHz with a four-stage pipeline, and a second low-power core; machine and user modes; no floating point; 512 KB of SRAM, 320 KB of ROM and an external flash; radios and peripherals on the same die. A complete computer in a few square millimetres, at a cost of about two euros, in which processor, memory and input/output are all present exactly as in the model.
 UNDERSTAND NOW: the RV32 processor.
 For the lecturer: From the Espressif ESP32-C6 datasheet. A complete computer on a chip of a few square millimetres that costs about two euros: processor, memory and input/output are all there, as in the model of the first slides.</a:t>
             </a:r>
@@ -1295,8 +1295,8 @@
           <a:p>
             <a:r>
               <a:rPr lang="en-US" dirty="0"/>
-              <a:t>Go back to the table that puts the model beside RISC-V and look for the rows marked "absent". One of them is among the options.
-Remember the warm-up: which instructions touched memory, and which only registers? That is the definition of a load-store architecture.
+              <a:t>For the first question one returns to the table placing the model beside RISC-V and looks for the rows marked "absent"; one of them is among the options.
+For the second, one recalls the warm-up: which instructions accessed memory, and which only registers? The answer is the definition of a load-store architecture.
 For the lecturer: 1. Answer: B. RISC-V has no condition codes: branches compare registers directly.
 2. Answer: C. It is a load-store architecture: lw, lh, lb, sw, sh, sb and their unsigned forms.</a:t>
             </a:r>
@@ -1386,8 +1386,8 @@
           <a:p>
             <a:r>
               <a:rPr lang="en-US" dirty="0"/>
-              <a:t>Follow the two instructions: the pointer moves down by one word, then a value is stored at the address it now holds. A value has been added on top of the stack.
-In an accumulator machine the accumulator is the implicit operand: it is one of the two addends and it receives the result. The operand written in the instruction is only read.
+              <a:t>For the first question the two instructions are followed in turn: the pointer moves down by one word, and a value is then stored at the address it now holds. A value has been pushed onto the stack.
+For the second: in an accumulator machine the accumulator is the implicit operand, serving as one of the two addends and receiving the result, while the operand written in the instruction is only read.
 For the lecturer: 1. Answer: B. The pointer moves down by one word and the value is stored on the new top: a push.
 2. Answer: B. The accumulator is the implicit operand and the destination.</a:t>
             </a:r>
@@ -1477,7 +1477,7 @@
           <a:p>
             <a:r>
               <a:rPr lang="en-US" dirty="0"/>
-              <a:t>Ten terms. The control unit is the unità di controllo. A machine register is one visible to the programmer. Flags are also called indicatori in Italian. Supervisor and user state are the two levels of privilege. A privileged instruction can be executed only in supervisor state.</a:t>
+              <a:t>Ten terms. The control unit is the unità di controllo. A machine register is one visible to the programmer. Flags are also called indicatori in Italian. Supervisor and user state are the two privilege levels. A privileged instruction may be executed only in supervisor state.</a:t>
             </a:r>
             <a:endParaRPr lang="en-US" dirty="0"/>
           </a:p>
@@ -1565,7 +1565,7 @@
           <a:p>
             <a:r>
               <a:rPr lang="en-US" dirty="0"/>
-              <a:t>Six objectives. Name the components of a processor. Distinguish internal registers from machine registers, and general registers from special ones. Explain how a stack works and how RISC-V implements push and pop. Compare three models of processor, accumulator, stack and general registers, on the same computation. Describe RISC-V as a load-store, general-register processor and read the name RV32IMAC. And map every element of the model onto the processor of the kit.</a:t>
+              <a:t>Six learning outcomes. Naming the components of a processor. Distinguishing internal registers from machine registers, and general-purpose from special registers. Explaining how a stack works and how RISC-V implements push and pop. Comparing three processor models, accumulator, stack and general registers, on the same computation. Describing RISC-V as a load-store, general-register architecture and reading the name RV32IMAC. And mapping every element of the model onto the processor of the kit.</a:t>
             </a:r>
             <a:endParaRPr lang="en-US" dirty="0"/>
           </a:p>
@@ -1653,7 +1653,7 @@
           <a:p>
             <a:r>
               <a:rPr lang="en-US" dirty="0"/>
-              <a:t>Five conclusions. The processor commands and controls, relying on memory and on input/output. Registers are storage locations, inside or outside the processor. The kinds of registers and their use determine the model: accumulator, stack, general registers. The ALU carries out the operations. And RISC-V is a load-store processor with general registers, no flags and no I/O instructions: few elements, each one simple. The next lecture follows an instruction through its whole life.
+              <a:t>Five conclusions. The processor commands and controls, relying on memory and on input/output. Registers are storage locations, internal or visible to the programmer. The kinds of registers and their use determine the processor model: accumulator, stack or general registers. The ALU performs the operations. And RISC-V is a load-store processor with general registers, no flags and no I/O instructions: few elements, each of them simple. The next lecture follows an instruction through its entire life.
 Learning status, recap. UNDERSTAND NOW: accumulator, stack, registers; the processor model; the registers of RISC-V; the calling convention; the stack; the RV32 processor. USE NOW: the complete program, the PRG32 tools (used, not studied, in this course). UNDERSTAND LATER: interrupts and traps (Lecture 19). A slide without a badge is context: a story, an example, a question, an exercise.
 For the lecturer: Next lecture: instructions and interrupts.</a:t>
             </a:r>
@@ -1743,7 +1743,7 @@
           <a:p>
             <a:r>
               <a:rPr lang="en-US" dirty="0"/>
-              <a:t>A reminder and a definition. A computer has three subsystems, processor, main memory and input/output, connected by buses. The processor can execute only a fixed set of instructions, from a few tens to a few hundred, and machine language is the set of strings of bits that encode them. Instructions request two kinds of things: transfers of information and arithmetic or logic operations. Both programs and data are in the main memory.
+              <a:t>A reminder and a definition. A computer comprises three subsystems, processor, main memory and input/output, connected by buses. The processor can execute only a fixed set of instructions, from a few tens to a few hundred, and machine language is the set of bit strings that encode them. Instructions request two kinds of action: transfers of information, and arithmetic or logical operations. Programs and data both reside in main memory, as the von Neumann model of Lecture 03 prescribes.
 UNDERSTAND NOW: the processor model.
 For the lecturer: RV32I, the base of RISC-V, has about forty instructions; with the M, A and C extensions of the kit, about a hundred encodings. The Motorola 68000 had fifty-six instruction types with many variants each.</a:t>
             </a:r>
@@ -1833,7 +1833,7 @@
           <a:p>
             <a:r>
               <a:rPr lang="en-US" dirty="0"/>
-              <a:t>The reference model. The control unit contains the program counter, which holds the address of the next instruction, a decoding register, which holds the instruction being executed, and the network that issues the commands. The machine registers R0 to Rn-1 are those the programmer uses. The arithmetic logic unit has two operand registers and a result register. Two pairs of registers link the processor to the outside: MA and MB towards memory, RI and RU towards input and output. An internal bus connects everything.
+              <a:t>The reference model. The control unit contains the program counter, which holds the address of the next instruction; a decoding register, which holds the instruction being executed; and the network that issues the control signals. The machine registers R0 to Rn-1 are those used by the programmer. The arithmetic logic unit has two operand registers and a result register. Two pairs of registers link the processor to the outside world: MA and MB towards memory, RI and RU towards input and output. An internal bus connects them all, in the manner of the common bus of Lecture 14.
 UNDERSTAND NOW: the processor model.
 For the lecturer: Modello di riferimento. Although based on the same logical scheme, and so made of rather similar components, the processors on the market can be very different from one another.</a:t>
             </a:r>
@@ -1923,7 +1923,7 @@
           <a:p>
             <a:r>
               <a:rPr lang="en-US" dirty="0"/>
-              <a:t>Each element of the model, and what it is in RISC-V. The program counter is pc. The machine registers are x0 to x31, with the names you know. The registers of the ALU and those towards memory exist in the hardware but are invisible to the programmer. Two rows say "absent", and they are deliberate choices: there are no registers for input and output, because devices are memory-mapped, and there is no status register with flags. The special registers are the CSRs, reserved for privileged software.
+              <a:t>Each element of the model, and its counterpart in RISC-V. The program counter is pc. The machine registers are x0 to x31, with their familiar names. The ALU registers and the memory interface registers exist in the hardware but are invisible to the programmer. Two rows read "absent", and both are deliberate design choices: there are no registers for input and output, because devices are memory-mapped, and there is no status register with flags. The special registers are the CSRs, reserved for privileged software and treated in Lecture 19.
 UNDERSTAND NOW: the processor model.
 For the lecturer: The two 'absent' rows are deliberate simplifications of RISC-V, explained later in this lecture and in Lecture 15. The MC68000 of the original deck had all the elements of the model: eight data and eight address registers, a status register with condition codes, and separate interrupt circuitry.</a:t>
             </a:r>
@@ -2013,7 +2013,7 @@
           <a:p>
             <a:r>
               <a:rPr lang="en-US" dirty="0"/>
-              <a:t>Two classes of registers. Internal registers are necessary for the processor to work but are not visible to the programmer: the program counter, the registers towards memory, those of the ALU. Machine registers define the programming model: they are the ones named in instructions. The processor handles three kinds of information, instructions, addresses and data, and each could have its own size. In RV32 all three are 32 bits wide, which makes the machine very regular.
+              <a:t>Two classes of registers. Internal registers are necessary for the operation of the processor but invisible to the programmer: the program counter, the memory interface registers, those of the ALU. Machine registers define the programming model, being those named in instructions. The processor handles three kinds of information, instructions, addresses and data, each of which could in principle have its own width. In RV32 all three are 32 bits wide, which gives the machine a marked regularity.
 UNDERSTAND NOW: the processor model.
 For the lecturer: Tipi di dato del processore. The '32' of RV32 is the width of the registers; RV64 has 64-bit registers and addresses and the same 32-bit instructions.</a:t>
             </a:r>
@@ -2103,7 +2103,7 @@
           <a:p>
             <a:r>
               <a:rPr lang="en-US" dirty="0"/>
-              <a:t>A processor has at least two states of operation. In supervisor state it runs the operating system and may execute every instruction. In user state it runs an ordinary program and may execute everything except the privileged instructions, those that could compromise the system. RISC-V calls them modes: machine mode, the most privileged and the only mandatory one, supervisor mode and user mode. The chip of the kit has machine and user. Passing from one to the other happens through the traps of the next lecture.
+              <a:t>A processor has at least two states of operation. In supervisor state it runs the operating system and may execute every instruction. In user state it runs an ordinary program and may execute everything except the privileged instructions, those whose misuse could compromise the system. RISC-V calls these states modes: machine mode, the most privileged and the only mandatory one, supervisor mode and user mode. The chip of the kit implements machine and user modes. Transitions between them occur through the traps of the next lecture.
 UNDERSTAND NOW: the processor model. UNDERSTAND LATER: interrupts and traps (studied in Lecture 19).
 For the lecturer: Stato utente o stato supervisore. RISC-V defines three privilege modes: M, the most privileged and the only mandatory one, runs firmware; S runs the kernel of an operating system such as Linux; U runs applications. The ESP32-C6 implements M and U. Changing mode happens through traps (Lecture 19).</a:t>
             </a:r>
@@ -2193,7 +2193,7 @@
           <a:p>
             <a:r>
               <a:rPr lang="en-US" dirty="0"/>
-              <a:t>Five functions of registers. Transit: carrying data between memory and registers. Accumulation: holding the operands and the results of arithmetic. Addressing: holding an address or part of one, as base and index registers do. Stack pointer: indicating the top of a stack in memory. Flags: single bits that record events such as zero, sign, overflow and carry, to condition later instructions. In RISC-V the general registers serve the first four functions; the fifth does not exist as a register.
+              <a:t>Five functions of registers. Transit: carrying data between memory and registers. Accumulation: holding the operands and results of arithmetic. Addressing: holding an address or part of one, as base and index registers do. Stack pointer: indicating the top of a stack in memory. Flags: single bits recording events such as zero, sign, overflow and carry, which condition subsequent instructions. In RISC-V the general registers serve the first four functions; the fifth does not exist as a register at all.
 UNDERSTAND NOW: the registers of RISC-V.
 For the lecturer: Funzione dei registri. In RISC-V the first four functions are all served by the general registers; the fifth does not exist as a register.</a:t>
             </a:r>
@@ -2283,7 +2283,7 @@
           <a:p>
             <a:r>
               <a:rPr lang="en-US" dirty="0"/>
-              <a:t>The complete table of the registers of RISC-V, with numbers, names and roles. You have used most of them: zero, ra, sp, the temporaries t0 to t6, the arguments a0 to a7, the saved registers s0 to s11. Two are new: gp and tp, used by compilers and operating systems. The hardware treats x1 to x31 identically; only x0 is special. The roles come from the calling convention. The program counter is not in the bank.
+              <a:t>The complete table of the RISC-V registers, with numbers, names and roles. Most have been in use for weeks: zero, ra, sp, the temporaries t0 to t6, the arguments a0 to a7, the saved registers s0 to s11; gp and tp are new, used by compilers and operating systems. The hardware treats x1 to x31 identically and only x0 is special; the roles derive from the calling convention, met in Lecture 02 and stated here as a rule. A call may overwrite ra and the t and a registers, which are caller-saved: a caller that still needs one saves it before the call. A call must return the s registers and sp unchanged, which are callee-saved: a function that uses one saves it in its frame and restores it before ret. The program counter is not part of the register bank.
 UNDERSTAND NOW: the registers of RISC-V; the calling convention.
 For the lecturer: The hardware treats x1 to x31 identically; only x0 is special. The roles come from the calling convention, met in Lecture 02 and stated here as a rule: a call may destroy ra, t and a registers (caller-saved: save them before the call if you still need them); it must return s registers and sp unchanged (callee-saved: a function that uses them saves them in its frame and restores them before ret). The MC68000 instead separated data registers D0-D7 from address registers A0-A7, with A7 as stack pointer.</a:t>
             </a:r>
@@ -3363,7 +3363,7 @@
                 <a:ea typeface="Calibri" pitchFamily="34" charset="-122"/>
                 <a:cs typeface="Calibri" pitchFamily="34" charset="-120"/>
               </a:rPr>
-              <a:t>18-Computer_Architecture-Processor-Code.pptx</a:t>
+              <a:t>18-Computer_Architecture-Processor-Lab.pptx</a:t>
             </a:r>
             <a:endParaRPr lang="en-US" sz="1300" dirty="0"/>
           </a:p>

--- a/en/slides/18-Computer_Architecture-Processor.pptx
+++ b/en/slides/18-Computer_Architecture-Processor.pptx
@@ -126,13 +126,13 @@
   <p:extLst>
     <p:ext uri="{521415D9-36F7-43E2-AB2F-B90AF26B5E84}">
       <p14:sectionLst xmlns:p14="http://schemas.microsoft.com/office/powerpoint/2010/main">
-        <p14:section name="Opening" id="{2fac30c6-1899-1a68-0d41-2491e2747a91}">
+        <p14:section name="Opening" id="{31ebcb59-b64e-fa2f-5f33-e65f28a835f9}">
           <p14:sldIdLst>
             <p14:sldId id="256"/>
             <p14:sldId id="257"/>
           </p14:sldIdLst>
         </p14:section>
-        <p14:section name="The processor" id="{725b57d8-1311-cba2-59d9-32b28760cff3}">
+        <p14:section name="The processor" id="{05011591-6d33-9666-91d7-0f0146166212}">
           <p14:sldIdLst>
             <p14:sldId id="258"/>
             <p14:sldId id="259"/>
@@ -141,7 +141,7 @@
             <p14:sldId id="262"/>
           </p14:sldIdLst>
         </p14:section>
-        <p14:section name="Registers" id="{93ceafe0-07ce-d9fd-9f54-d8815ac22f9a}">
+        <p14:section name="Registers" id="{516ecca1-fa50-e322-b931-f843dabfe9d3}">
           <p14:sldIdLst>
             <p14:sldId id="263"/>
             <p14:sldId id="264"/>
@@ -149,18 +149,18 @@
             <p14:sldId id="266"/>
           </p14:sldIdLst>
         </p14:section>
-        <p14:section name="The stack" id="{23d65db0-320f-b958-5eda-d5d545c5c14d}">
+        <p14:section name="The stack" id="{93f7fea2-91dc-1d39-fb0d-dd4066a82a2d}">
           <p14:sldIdLst>
             <p14:sldId id="267"/>
           </p14:sldIdLst>
         </p14:section>
-        <p14:section name="Processor models" id="{c1e26560-ae66-668b-98a8-263b17ef1a04}">
+        <p14:section name="Processor models" id="{6107a845-69f2-66b4-320d-2b7ec47d5241}">
           <p14:sldIdLst>
             <p14:sldId id="268"/>
             <p14:sldId id="269"/>
           </p14:sldIdLst>
         </p14:section>
-        <p14:section name="The ALU and the whole picture" id="{9cf4024a-d5b8-578d-563a-80fd733f5fea}">
+        <p14:section name="The ALU and the whole picture" id="{da8184b0-aa93-a500-2bcf-4f6db782b7f6}">
           <p14:sldIdLst>
             <p14:sldId id="270"/>
             <p14:sldId id="271"/>
@@ -665,7 +665,7 @@
           <a:p>
             <a:r>
               <a:rPr lang="en-US" dirty="0"/>
-              <a:t>Many processors have a status register whose bits, the flags, record the outcome of the last operation: zero, negative, overflow, carry. One instruction sets them and a later conditional branch tests them. RISC-V has none. A branch compares two registers and jumps, in a single instruction; slt writes the result of a comparison into an ordinary register; carry and overflow are computed when required, as in Lecture 05. Less hidden state means a simpler processor, simpler pipelining and simpler interrupt handling, since there is no implicit state to save.
+              <a:t>Many processors have a status register whose bits, the flags, record the outcome of the last operation: zero, negative, overflow, carry. One instruction sets them and a later conditional branch tests them. RISC-V has none. A branch compares two registers and jumps, in a single instruction; slt writes the result of a comparison into an ordinary register; carry and overflow are computed when required, as in Lecture 05. Less hidden state means a simpler processor, simpler pipelining (overlapping the steps of successive instructions, as on an assembly line) and simpler interrupt handling, since there is no implicit state to save.
 UNDERSTAND NOW: the registers of RISC-V.
 For the lecturer: Registro di stato. The original deck listed Z, N, P (positive), V, C and a parity bit.</a:t>
             </a:r>

--- a/en/slides/18-Computer_Architecture-Processor.pptx
+++ b/en/slides/18-Computer_Architecture-Processor.pptx
@@ -126,13 +126,13 @@
   <p:extLst>
     <p:ext uri="{521415D9-36F7-43E2-AB2F-B90AF26B5E84}">
       <p14:sectionLst xmlns:p14="http://schemas.microsoft.com/office/powerpoint/2010/main">
-        <p14:section name="Opening" id="{31ebcb59-b64e-fa2f-5f33-e65f28a835f9}">
+        <p14:section name="Opening" id="{8199afdb-3485-5a6c-1f97-8fcb745ed7b0}">
           <p14:sldIdLst>
             <p14:sldId id="256"/>
             <p14:sldId id="257"/>
           </p14:sldIdLst>
         </p14:section>
-        <p14:section name="The processor" id="{05011591-6d33-9666-91d7-0f0146166212}">
+        <p14:section name="The processor" id="{c9fad747-b66e-9c52-a8c3-be758d42027e}">
           <p14:sldIdLst>
             <p14:sldId id="258"/>
             <p14:sldId id="259"/>
@@ -141,7 +141,7 @@
             <p14:sldId id="262"/>
           </p14:sldIdLst>
         </p14:section>
-        <p14:section name="Registers" id="{516ecca1-fa50-e322-b931-f843dabfe9d3}">
+        <p14:section name="Registers" id="{6d2c8995-eafb-4788-10d6-2eb21cc4167d}">
           <p14:sldIdLst>
             <p14:sldId id="263"/>
             <p14:sldId id="264"/>
@@ -149,18 +149,18 @@
             <p14:sldId id="266"/>
           </p14:sldIdLst>
         </p14:section>
-        <p14:section name="The stack" id="{93f7fea2-91dc-1d39-fb0d-dd4066a82a2d}">
+        <p14:section name="The stack" id="{c8e92082-9980-8a58-e68d-beaff93bb438}">
           <p14:sldIdLst>
             <p14:sldId id="267"/>
           </p14:sldIdLst>
         </p14:section>
-        <p14:section name="Processor models" id="{6107a845-69f2-66b4-320d-2b7ec47d5241}">
+        <p14:section name="Processor models" id="{88ab57d6-946c-dda9-c3b7-6c092eb3f078}">
           <p14:sldIdLst>
             <p14:sldId id="268"/>
             <p14:sldId id="269"/>
           </p14:sldIdLst>
         </p14:section>
-        <p14:section name="The ALU and the whole picture" id="{da8184b0-aa93-a500-2bcf-4f6db782b7f6}">
+        <p14:section name="The ALU and the whole picture" id="{359963eb-6be8-1852-398c-1cc018e2ece4}">
           <p14:sldIdLst>
             <p14:sldId id="270"/>
             <p14:sldId id="271"/>
@@ -577,6 +577,7 @@
               <a:t>The final block of the course opens the machine that has been executing every program written so far. This lecture presents the processor twice: first as a general reference model, valid for any processor, with its control unit, registers, stack and arithmetic unit; then as RISC-V, the processor programmed since the first weeks. Every abstract element of the model already has, for the student, a familiar name, and the lecture's method is to make that correspondence explicit. The ring of the epigraph is the processor itself: the one component that commands all the others.
 Learning status: UNDERSTAND NOW, by the end of this lecture you explain it, trace it and apply it on your own; USE NOW, you follow and use the recipe today; how it works inside is explained later, or is not part of the course; UNDERSTAND LATER, recognise the name and what it is for; a later lecture explains it. A slide without a badge is context: a story, an example, a question, an exercise.
 Learning status of this lecture. UNDERSTAND NOW: accumulator, stack, registers; the processor model; the registers of RISC-V; the calling convention; the stack; the RV32 processor. USE NOW: the complete program, the PRG32 tools (used, not studied, in this course). UNDERSTAND LATER: interrupts and traps (Lecture 19). A slide without a badge is context: a story, an example, a question, an exercise.
+Roadmap. Today's outcomes: (1) follow an instruction through the blocks of an RV32 processor; (2) use the stack and the calling convention correctly; (3) compare accumulator, stack and register machines. Builds on: only what Lecture 01 set up. Next: Lecture 19, Instructions and Interrupts.
 For the lecturer: The original deck presented a general processor model and ended with the architecture of the Motorola MC68000. Here the general model is kept and RISC-V (RV32IMAC, as on the ESP32-C6 of the PRG32 kit) is the reference: the students have programmed it since the first days, so every abstract element has a name they already know.</a:t>
             </a:r>
             <a:endParaRPr lang="en-US" dirty="0"/>
@@ -1654,7 +1655,7 @@
             <a:r>
               <a:rPr lang="en-US" dirty="0"/>
               <a:t>Five conclusions. The processor commands and controls, relying on memory and on input/output. Registers are storage locations, internal or visible to the programmer. The kinds of registers and their use determine the processor model: accumulator, stack or general registers. The ALU performs the operations. And RISC-V is a load-store processor with general registers, no flags and no I/O instructions: few elements, each of them simple. The next lecture follows an instruction through its entire life.
-Learning status, recap. UNDERSTAND NOW: accumulator, stack, registers; the processor model; the registers of RISC-V; the calling convention; the stack; the RV32 processor. USE NOW: the complete program, the PRG32 tools (used, not studied, in this course). UNDERSTAND LATER: interrupts and traps (Lecture 19). A slide without a badge is context: a story, an example, a question, an exercise.
+Learning status, recap. UNDERSTAND NOW: accumulator, stack, registers; the processor model; the registers of RISC-V; the calling convention; the stack; the RV32 processor. USE NOW: the complete program, the PRG32 tools (used, not studied, in this course). UNDERSTAND LATER: interrupts and traps (Lecture 19). A slide without a badge is context: a story, an example, a question, an exercise. Closing thread: The ra saved in Lecture 02 is now explained: the stack and the calling convention are rules that let functions written by different people call each other. Next: how an instruction is encoded and executed, and how the processor is interrupted. Exit ticket (two to four minutes, alone, on paper): 1. Follow add t2, t0, t1 through the block diagram of an RV32 processor: name, in order, the blocks it uses and what each does. Which block does it not use? 2. A function begins with addi sp, sp, -16 and sw ra, 12(sp). Where is ra now, and what must the function do before ret?
 For the lecturer: Next lecture: instructions and interrupts.</a:t>
             </a:r>
             <a:endParaRPr lang="en-US" dirty="0"/>
